--- a/examples/chat-product.pptx
+++ b/examples/chat-product.pptx
@@ -1843,7 +1843,7 @@
         <p:spPr>
           <a:xfrm>
             <a:off x="400050" y="838200"/>
-            <a:ext cx="7239000" cy="914400"/>
+            <a:ext cx="7239000" cy="933450"/>
           </a:xfrm>
           <a:prstGeom prst="rect">
             <a:avLst/>
@@ -1904,8 +1904,8 @@
         </p:nvSpPr>
         <p:spPr>
           <a:xfrm>
-            <a:off x="400050" y="1924050"/>
-            <a:ext cx="6858000" cy="609600"/>
+            <a:off x="400050" y="2038350"/>
+            <a:ext cx="6858000" cy="381000"/>
           </a:xfrm>
           <a:prstGeom prst="rect">
             <a:avLst/>
@@ -1929,7 +1929,7 @@
                 <a:ea typeface="Helvetica Neue" pitchFamily="34" charset="-122"/>
                 <a:cs typeface="Helvetica Neue" pitchFamily="34" charset="-120"/>
               </a:rPr>
-              <a:t>Requirements and architecture for a WhatsApp-class chat experience—1:1, groups, media, calls.</a:t>
+              <a:t>Requirements and architecture for a WhatsApp-class chat experience.</a:t>
             </a:r>
             <a:endParaRPr lang="en-US" sz="1700" dirty="0"/>
           </a:p>
@@ -2531,7 +2531,7 @@
         <p:spPr>
           <a:xfrm>
             <a:off x="400050" y="247650"/>
-            <a:ext cx="10839450" cy="381000"/>
+            <a:ext cx="10839450" cy="428625"/>
           </a:xfrm>
           <a:prstGeom prst="rect">
             <a:avLst/>
@@ -2547,7 +2547,7 @@
               <a:buNone/>
             </a:pPr>
             <a:r>
-              <a:rPr lang="en-US" sz="3000" b="1" dirty="0">
+              <a:rPr lang="en-US" sz="3200" b="1" dirty="0">
                 <a:solidFill>
                   <a:srgbClr val="EAEAEA"/>
                 </a:solidFill>
@@ -2557,7 +2557,7 @@
               </a:rPr>
               <a:t>Activation funnel (north-star)</a:t>
             </a:r>
-            <a:endParaRPr lang="en-US" sz="3000" dirty="0"/>
+            <a:endParaRPr lang="en-US" sz="3200" dirty="0"/>
           </a:p>
         </p:txBody>
       </p:sp>
@@ -2647,12 +2647,12 @@
         </p:nvSpPr>
         <p:spPr>
           <a:xfrm>
-            <a:off x="400050" y="781050"/>
-            <a:ext cx="11391900" cy="1028700"/>
+            <a:off x="400050" y="904875"/>
+            <a:ext cx="11391900" cy="1000125"/>
           </a:xfrm>
           <a:prstGeom prst="roundRect">
             <a:avLst>
-              <a:gd name="adj" fmla="val 8889"/>
+              <a:gd name="adj" fmla="val 9143"/>
             </a:avLst>
           </a:prstGeom>
           <a:solidFill>
@@ -2674,7 +2674,7 @@
         </p:nvSpPr>
         <p:spPr>
           <a:xfrm>
-            <a:off x="552450" y="1190625"/>
+            <a:off x="552450" y="1300163"/>
             <a:ext cx="11087100" cy="228600"/>
           </a:xfrm>
           <a:prstGeom prst="rect">
@@ -2713,12 +2713,12 @@
         </p:nvSpPr>
         <p:spPr>
           <a:xfrm>
-            <a:off x="969645" y="1905000"/>
-            <a:ext cx="10252710" cy="1028700"/>
+            <a:off x="969645" y="2000250"/>
+            <a:ext cx="10252710" cy="1000125"/>
           </a:xfrm>
           <a:prstGeom prst="roundRect">
             <a:avLst>
-              <a:gd name="adj" fmla="val 8889"/>
+              <a:gd name="adj" fmla="val 9143"/>
             </a:avLst>
           </a:prstGeom>
           <a:solidFill>
@@ -2740,7 +2740,7 @@
         </p:nvSpPr>
         <p:spPr>
           <a:xfrm>
-            <a:off x="1122045" y="2314575"/>
+            <a:off x="1122045" y="2395538"/>
             <a:ext cx="9947910" cy="228600"/>
           </a:xfrm>
           <a:prstGeom prst="rect">
@@ -2779,12 +2779,12 @@
         </p:nvSpPr>
         <p:spPr>
           <a:xfrm>
-            <a:off x="1539240" y="3028950"/>
-            <a:ext cx="9113520" cy="1028700"/>
+            <a:off x="1539240" y="3095625"/>
+            <a:ext cx="9113520" cy="1000125"/>
           </a:xfrm>
           <a:prstGeom prst="roundRect">
             <a:avLst>
-              <a:gd name="adj" fmla="val 8889"/>
+              <a:gd name="adj" fmla="val 9143"/>
             </a:avLst>
           </a:prstGeom>
           <a:solidFill>
@@ -2806,7 +2806,7 @@
         </p:nvSpPr>
         <p:spPr>
           <a:xfrm>
-            <a:off x="1691640" y="3438525"/>
+            <a:off x="1691640" y="3490913"/>
             <a:ext cx="8808720" cy="228600"/>
           </a:xfrm>
           <a:prstGeom prst="rect">
@@ -2845,12 +2845,12 @@
         </p:nvSpPr>
         <p:spPr>
           <a:xfrm>
-            <a:off x="2108835" y="4152900"/>
-            <a:ext cx="7974330" cy="1028700"/>
+            <a:off x="2108835" y="4191000"/>
+            <a:ext cx="7974330" cy="1000125"/>
           </a:xfrm>
           <a:prstGeom prst="roundRect">
             <a:avLst>
-              <a:gd name="adj" fmla="val 8889"/>
+              <a:gd name="adj" fmla="val 9143"/>
             </a:avLst>
           </a:prstGeom>
           <a:solidFill>
@@ -2872,7 +2872,7 @@
         </p:nvSpPr>
         <p:spPr>
           <a:xfrm>
-            <a:off x="2261235" y="4562475"/>
+            <a:off x="2261235" y="4586288"/>
             <a:ext cx="7669530" cy="228600"/>
           </a:xfrm>
           <a:prstGeom prst="rect">
@@ -2911,12 +2911,12 @@
         </p:nvSpPr>
         <p:spPr>
           <a:xfrm>
-            <a:off x="2678430" y="5276850"/>
-            <a:ext cx="6835140" cy="1028700"/>
+            <a:off x="2678430" y="5286375"/>
+            <a:ext cx="6835140" cy="1000125"/>
           </a:xfrm>
           <a:prstGeom prst="roundRect">
             <a:avLst>
-              <a:gd name="adj" fmla="val 8889"/>
+              <a:gd name="adj" fmla="val 9143"/>
             </a:avLst>
           </a:prstGeom>
           <a:solidFill>
@@ -2938,7 +2938,7 @@
         </p:nvSpPr>
         <p:spPr>
           <a:xfrm>
-            <a:off x="2830830" y="5686425"/>
+            <a:off x="2830830" y="5681663"/>
             <a:ext cx="6530340" cy="228600"/>
           </a:xfrm>
           <a:prstGeom prst="rect">
@@ -3078,8 +3078,8 @@
         </p:nvSpPr>
         <p:spPr>
           <a:xfrm>
-            <a:off x="400050" y="1238250"/>
-            <a:ext cx="9525000" cy="1333500"/>
+            <a:off x="400050" y="1143000"/>
+            <a:ext cx="9525000" cy="1371600"/>
           </a:xfrm>
           <a:prstGeom prst="rect">
             <a:avLst/>
@@ -3140,8 +3140,8 @@
         </p:nvSpPr>
         <p:spPr>
           <a:xfrm>
-            <a:off x="400050" y="2952750"/>
-            <a:ext cx="8572500" cy="571500"/>
+            <a:off x="400050" y="2781300"/>
+            <a:ext cx="8572500" cy="342900"/>
           </a:xfrm>
           <a:prstGeom prst="rect">
             <a:avLst/>
@@ -3231,7 +3231,7 @@
         </p:nvSpPr>
         <p:spPr>
           <a:xfrm>
-            <a:off x="571500" y="4152900"/>
+            <a:off x="571500" y="4114800"/>
             <a:ext cx="3105150" cy="171450"/>
           </a:xfrm>
           <a:prstGeom prst="rect">
@@ -3270,8 +3270,8 @@
         </p:nvSpPr>
         <p:spPr>
           <a:xfrm>
-            <a:off x="571500" y="4419600"/>
-            <a:ext cx="3105150" cy="571500"/>
+            <a:off x="571500" y="4362450"/>
+            <a:ext cx="3105150" cy="666750"/>
           </a:xfrm>
           <a:prstGeom prst="rect">
             <a:avLst/>
@@ -3361,7 +3361,7 @@
         </p:nvSpPr>
         <p:spPr>
           <a:xfrm>
-            <a:off x="4343400" y="4152900"/>
+            <a:off x="4343400" y="4114800"/>
             <a:ext cx="3105150" cy="171450"/>
           </a:xfrm>
           <a:prstGeom prst="rect">
@@ -3400,8 +3400,8 @@
         </p:nvSpPr>
         <p:spPr>
           <a:xfrm>
-            <a:off x="4343400" y="4419600"/>
-            <a:ext cx="3105150" cy="571500"/>
+            <a:off x="4343400" y="4362450"/>
+            <a:ext cx="3105150" cy="666750"/>
           </a:xfrm>
           <a:prstGeom prst="rect">
             <a:avLst/>
@@ -3491,7 +3491,7 @@
         </p:nvSpPr>
         <p:spPr>
           <a:xfrm>
-            <a:off x="8115300" y="4152900"/>
+            <a:off x="8115300" y="4114800"/>
             <a:ext cx="3105150" cy="171450"/>
           </a:xfrm>
           <a:prstGeom prst="rect">
@@ -3530,8 +3530,8 @@
         </p:nvSpPr>
         <p:spPr>
           <a:xfrm>
-            <a:off x="8115300" y="4419600"/>
-            <a:ext cx="3105150" cy="571500"/>
+            <a:off x="8115300" y="4362450"/>
+            <a:ext cx="3105150" cy="666750"/>
           </a:xfrm>
           <a:prstGeom prst="rect">
             <a:avLst/>
@@ -3787,8 +3787,8 @@
         </p:nvSpPr>
         <p:spPr>
           <a:xfrm>
-            <a:off x="1524000" y="2190750"/>
-            <a:ext cx="9144000" cy="1047750"/>
+            <a:off x="1524000" y="2552700"/>
+            <a:ext cx="9144000" cy="609600"/>
           </a:xfrm>
           <a:prstGeom prst="rect">
             <a:avLst/>
@@ -3826,8 +3826,8 @@
         </p:nvSpPr>
         <p:spPr>
           <a:xfrm>
-            <a:off x="1524000" y="3381375"/>
-            <a:ext cx="9144000" cy="428625"/>
+            <a:off x="1524000" y="3467100"/>
+            <a:ext cx="9144000" cy="457200"/>
           </a:xfrm>
           <a:prstGeom prst="rect">
             <a:avLst/>
@@ -4006,7 +4006,7 @@
         <p:spPr>
           <a:xfrm>
             <a:off x="400050" y="247650"/>
-            <a:ext cx="10839450" cy="381000"/>
+            <a:ext cx="10839450" cy="428625"/>
           </a:xfrm>
           <a:prstGeom prst="rect">
             <a:avLst/>
@@ -4022,7 +4022,7 @@
               <a:buNone/>
             </a:pPr>
             <a:r>
-              <a:rPr lang="en-US" sz="3000" b="1" dirty="0">
+              <a:rPr lang="en-US" sz="3200" b="1" dirty="0">
                 <a:solidFill>
                   <a:srgbClr val="EAEAEA"/>
                 </a:solidFill>
@@ -4032,7 +4032,7 @@
               </a:rPr>
               <a:t>Why users stay (and leave)</a:t>
             </a:r>
-            <a:endParaRPr lang="en-US" sz="3000" dirty="0"/>
+            <a:endParaRPr lang="en-US" sz="3200" dirty="0"/>
           </a:p>
         </p:txBody>
       </p:sp>
@@ -4122,12 +4122,12 @@
         </p:nvSpPr>
         <p:spPr>
           <a:xfrm>
-            <a:off x="400050" y="781050"/>
-            <a:ext cx="5695950" cy="5543550"/>
+            <a:off x="400050" y="904875"/>
+            <a:ext cx="5695950" cy="5419725"/>
           </a:xfrm>
           <a:prstGeom prst="roundRect">
             <a:avLst>
-              <a:gd name="adj" fmla="val 1649"/>
+              <a:gd name="adj" fmla="val 1687"/>
             </a:avLst>
           </a:prstGeom>
           <a:solidFill>
@@ -4149,7 +4149,7 @@
         </p:nvSpPr>
         <p:spPr>
           <a:xfrm>
-            <a:off x="400050" y="781050"/>
+            <a:off x="400050" y="904875"/>
             <a:ext cx="5695950" cy="76200"/>
           </a:xfrm>
           <a:prstGeom prst="rect">
@@ -4174,7 +4174,7 @@
         </p:nvSpPr>
         <p:spPr>
           <a:xfrm>
-            <a:off x="609600" y="1009650"/>
+            <a:off x="609600" y="1133475"/>
             <a:ext cx="5276850" cy="171450"/>
           </a:xfrm>
           <a:prstGeom prst="rect">
@@ -4213,7 +4213,7 @@
         </p:nvSpPr>
         <p:spPr>
           <a:xfrm>
-            <a:off x="609600" y="1304925"/>
+            <a:off x="609600" y="1428750"/>
             <a:ext cx="5276850" cy="476250"/>
           </a:xfrm>
           <a:prstGeom prst="rect">
@@ -4252,7 +4252,7 @@
         </p:nvSpPr>
         <p:spPr>
           <a:xfrm>
-            <a:off x="609600" y="2066925"/>
+            <a:off x="609600" y="2276475"/>
             <a:ext cx="66675" cy="66675"/>
           </a:xfrm>
           <a:prstGeom prst="roundRect">
@@ -4279,17 +4279,17 @@
         </p:nvSpPr>
         <p:spPr>
           <a:xfrm>
-            <a:off x="800100" y="1981200"/>
-            <a:ext cx="5086350" cy="342900"/>
-          </a:xfrm>
-          <a:prstGeom prst="rect">
-            <a:avLst/>
-          </a:prstGeom>
-          <a:noFill/>
-          <a:ln/>
-        </p:spPr>
-        <p:txBody>
-          <a:bodyPr wrap="square" lIns="0" tIns="0" rIns="0" bIns="0" rtlCol="0" anchor="t"/>
+            <a:off x="800100" y="2105025"/>
+            <a:ext cx="5086350" cy="419100"/>
+          </a:xfrm>
+          <a:prstGeom prst="rect">
+            <a:avLst/>
+          </a:prstGeom>
+          <a:noFill/>
+          <a:ln/>
+        </p:spPr>
+        <p:txBody>
+          <a:bodyPr wrap="square" lIns="0" tIns="0" rIns="0" bIns="0" rtlCol="0" anchor="ctr"/>
           <a:lstStyle/>
           <a:p>
             <a:pPr algn="l" indent="0" marL="0">
@@ -4318,7 +4318,7 @@
         </p:nvSpPr>
         <p:spPr>
           <a:xfrm>
-            <a:off x="609600" y="2600325"/>
+            <a:off x="609600" y="2733675"/>
             <a:ext cx="66675" cy="66675"/>
           </a:xfrm>
           <a:prstGeom prst="roundRect">
@@ -4345,17 +4345,17 @@
         </p:nvSpPr>
         <p:spPr>
           <a:xfrm>
-            <a:off x="800100" y="2514600"/>
-            <a:ext cx="5086350" cy="342900"/>
-          </a:xfrm>
-          <a:prstGeom prst="rect">
-            <a:avLst/>
-          </a:prstGeom>
-          <a:noFill/>
-          <a:ln/>
-        </p:spPr>
-        <p:txBody>
-          <a:bodyPr wrap="square" lIns="0" tIns="0" rIns="0" bIns="0" rtlCol="0" anchor="t"/>
+            <a:off x="800100" y="2562225"/>
+            <a:ext cx="5086350" cy="419100"/>
+          </a:xfrm>
+          <a:prstGeom prst="rect">
+            <a:avLst/>
+          </a:prstGeom>
+          <a:noFill/>
+          <a:ln/>
+        </p:spPr>
+        <p:txBody>
+          <a:bodyPr wrap="square" lIns="0" tIns="0" rIns="0" bIns="0" rtlCol="0" anchor="ctr"/>
           <a:lstStyle/>
           <a:p>
             <a:pPr algn="l" indent="0" marL="0">
@@ -4384,7 +4384,7 @@
         </p:nvSpPr>
         <p:spPr>
           <a:xfrm>
-            <a:off x="609600" y="3133725"/>
+            <a:off x="609600" y="3190875"/>
             <a:ext cx="66675" cy="66675"/>
           </a:xfrm>
           <a:prstGeom prst="roundRect">
@@ -4411,17 +4411,17 @@
         </p:nvSpPr>
         <p:spPr>
           <a:xfrm>
-            <a:off x="800100" y="3048000"/>
-            <a:ext cx="5086350" cy="342900"/>
-          </a:xfrm>
-          <a:prstGeom prst="rect">
-            <a:avLst/>
-          </a:prstGeom>
-          <a:noFill/>
-          <a:ln/>
-        </p:spPr>
-        <p:txBody>
-          <a:bodyPr wrap="square" lIns="0" tIns="0" rIns="0" bIns="0" rtlCol="0" anchor="t"/>
+            <a:off x="800100" y="3019425"/>
+            <a:ext cx="5086350" cy="419100"/>
+          </a:xfrm>
+          <a:prstGeom prst="rect">
+            <a:avLst/>
+          </a:prstGeom>
+          <a:noFill/>
+          <a:ln/>
+        </p:spPr>
+        <p:txBody>
+          <a:bodyPr wrap="square" lIns="0" tIns="0" rIns="0" bIns="0" rtlCol="0" anchor="ctr"/>
           <a:lstStyle/>
           <a:p>
             <a:pPr algn="l" indent="0" marL="0">
@@ -4450,12 +4450,12 @@
         </p:nvSpPr>
         <p:spPr>
           <a:xfrm>
-            <a:off x="6324600" y="781050"/>
-            <a:ext cx="5467350" cy="5543550"/>
+            <a:off x="6324600" y="904875"/>
+            <a:ext cx="5467350" cy="5419725"/>
           </a:xfrm>
           <a:prstGeom prst="roundRect">
             <a:avLst>
-              <a:gd name="adj" fmla="val 1672"/>
+              <a:gd name="adj" fmla="val 1687"/>
             </a:avLst>
           </a:prstGeom>
           <a:solidFill>
@@ -4477,7 +4477,7 @@
         </p:nvSpPr>
         <p:spPr>
           <a:xfrm>
-            <a:off x="6324600" y="781050"/>
+            <a:off x="6324600" y="904875"/>
             <a:ext cx="5467350" cy="76200"/>
           </a:xfrm>
           <a:prstGeom prst="rect">
@@ -4502,7 +4502,7 @@
         </p:nvSpPr>
         <p:spPr>
           <a:xfrm>
-            <a:off x="6534150" y="1009650"/>
+            <a:off x="6534150" y="1133475"/>
             <a:ext cx="5048250" cy="171450"/>
           </a:xfrm>
           <a:prstGeom prst="rect">
@@ -4541,7 +4541,7 @@
         </p:nvSpPr>
         <p:spPr>
           <a:xfrm>
-            <a:off x="6534150" y="1304925"/>
+            <a:off x="6534150" y="1428750"/>
             <a:ext cx="5048250" cy="476250"/>
           </a:xfrm>
           <a:prstGeom prst="rect">
@@ -4580,7 +4580,7 @@
         </p:nvSpPr>
         <p:spPr>
           <a:xfrm>
-            <a:off x="6534150" y="2066925"/>
+            <a:off x="6534150" y="2276475"/>
             <a:ext cx="66675" cy="66675"/>
           </a:xfrm>
           <a:prstGeom prst="roundRect">
@@ -4607,17 +4607,17 @@
         </p:nvSpPr>
         <p:spPr>
           <a:xfrm>
-            <a:off x="6724650" y="1981200"/>
-            <a:ext cx="4857750" cy="342900"/>
-          </a:xfrm>
-          <a:prstGeom prst="rect">
-            <a:avLst/>
-          </a:prstGeom>
-          <a:noFill/>
-          <a:ln/>
-        </p:spPr>
-        <p:txBody>
-          <a:bodyPr wrap="square" lIns="0" tIns="0" rIns="0" bIns="0" rtlCol="0" anchor="t"/>
+            <a:off x="6724650" y="2105025"/>
+            <a:ext cx="4857750" cy="419100"/>
+          </a:xfrm>
+          <a:prstGeom prst="rect">
+            <a:avLst/>
+          </a:prstGeom>
+          <a:noFill/>
+          <a:ln/>
+        </p:spPr>
+        <p:txBody>
+          <a:bodyPr wrap="square" lIns="0" tIns="0" rIns="0" bIns="0" rtlCol="0" anchor="ctr"/>
           <a:lstStyle/>
           <a:p>
             <a:pPr algn="l" indent="0" marL="0">
@@ -4646,7 +4646,7 @@
         </p:nvSpPr>
         <p:spPr>
           <a:xfrm>
-            <a:off x="6534150" y="2600325"/>
+            <a:off x="6534150" y="2733675"/>
             <a:ext cx="66675" cy="66675"/>
           </a:xfrm>
           <a:prstGeom prst="roundRect">
@@ -4673,17 +4673,17 @@
         </p:nvSpPr>
         <p:spPr>
           <a:xfrm>
-            <a:off x="6724650" y="2514600"/>
-            <a:ext cx="4857750" cy="342900"/>
-          </a:xfrm>
-          <a:prstGeom prst="rect">
-            <a:avLst/>
-          </a:prstGeom>
-          <a:noFill/>
-          <a:ln/>
-        </p:spPr>
-        <p:txBody>
-          <a:bodyPr wrap="square" lIns="0" tIns="0" rIns="0" bIns="0" rtlCol="0" anchor="t"/>
+            <a:off x="6724650" y="2562225"/>
+            <a:ext cx="4857750" cy="419100"/>
+          </a:xfrm>
+          <a:prstGeom prst="rect">
+            <a:avLst/>
+          </a:prstGeom>
+          <a:noFill/>
+          <a:ln/>
+        </p:spPr>
+        <p:txBody>
+          <a:bodyPr wrap="square" lIns="0" tIns="0" rIns="0" bIns="0" rtlCol="0" anchor="ctr"/>
           <a:lstStyle/>
           <a:p>
             <a:pPr algn="l" indent="0" marL="0">
@@ -4712,7 +4712,7 @@
         </p:nvSpPr>
         <p:spPr>
           <a:xfrm>
-            <a:off x="6534150" y="3133725"/>
+            <a:off x="6534150" y="3190875"/>
             <a:ext cx="66675" cy="66675"/>
           </a:xfrm>
           <a:prstGeom prst="roundRect">
@@ -4739,17 +4739,17 @@
         </p:nvSpPr>
         <p:spPr>
           <a:xfrm>
-            <a:off x="6724650" y="3048000"/>
-            <a:ext cx="4857750" cy="342900"/>
-          </a:xfrm>
-          <a:prstGeom prst="rect">
-            <a:avLst/>
-          </a:prstGeom>
-          <a:noFill/>
-          <a:ln/>
-        </p:spPr>
-        <p:txBody>
-          <a:bodyPr wrap="square" lIns="0" tIns="0" rIns="0" bIns="0" rtlCol="0" anchor="t"/>
+            <a:off x="6724650" y="3019425"/>
+            <a:ext cx="4857750" cy="419100"/>
+          </a:xfrm>
+          <a:prstGeom prst="rect">
+            <a:avLst/>
+          </a:prstGeom>
+          <a:noFill/>
+          <a:ln/>
+        </p:spPr>
+        <p:txBody>
+          <a:bodyPr wrap="square" lIns="0" tIns="0" rIns="0" bIns="0" rtlCol="0" anchor="ctr"/>
           <a:lstStyle/>
           <a:p>
             <a:pPr algn="l" indent="0" marL="0">
@@ -4841,7 +4841,7 @@
         <p:spPr>
           <a:xfrm>
             <a:off x="400050" y="247650"/>
-            <a:ext cx="10839450" cy="381000"/>
+            <a:ext cx="10839450" cy="428625"/>
           </a:xfrm>
           <a:prstGeom prst="rect">
             <a:avLst/>
@@ -4857,7 +4857,7 @@
               <a:buNone/>
             </a:pPr>
             <a:r>
-              <a:rPr lang="en-US" sz="3000" b="1" dirty="0">
+              <a:rPr lang="en-US" sz="3200" b="1" dirty="0">
                 <a:solidFill>
                   <a:srgbClr val="EAEAEA"/>
                 </a:solidFill>
@@ -4867,7 +4867,7 @@
               </a:rPr>
               <a:t>Targets and journeys (v1)</a:t>
             </a:r>
-            <a:endParaRPr lang="en-US" sz="3000" dirty="0"/>
+            <a:endParaRPr lang="en-US" sz="3200" dirty="0"/>
           </a:p>
         </p:txBody>
       </p:sp>
@@ -4957,8 +4957,8 @@
         </p:nvSpPr>
         <p:spPr>
           <a:xfrm>
-            <a:off x="400050" y="819150"/>
-            <a:ext cx="5619750" cy="171450"/>
+            <a:off x="400050" y="962025"/>
+            <a:ext cx="5257800" cy="171450"/>
           </a:xfrm>
           <a:prstGeom prst="rect">
             <a:avLst/>
@@ -4996,12 +4996,12 @@
         </p:nvSpPr>
         <p:spPr>
           <a:xfrm>
-            <a:off x="400050" y="2247900"/>
-            <a:ext cx="1714500" cy="2857500"/>
+            <a:off x="400050" y="1228725"/>
+            <a:ext cx="1657350" cy="1714500"/>
           </a:xfrm>
           <a:prstGeom prst="roundRect">
             <a:avLst>
-              <a:gd name="adj" fmla="val 5333"/>
+              <a:gd name="adj" fmla="val 5517"/>
             </a:avLst>
           </a:prstGeom>
           <a:solidFill>
@@ -5023,8 +5023,8 @@
         </p:nvSpPr>
         <p:spPr>
           <a:xfrm>
-            <a:off x="400050" y="2247900"/>
-            <a:ext cx="1714500" cy="76200"/>
+            <a:off x="400050" y="1228725"/>
+            <a:ext cx="1657350" cy="76200"/>
           </a:xfrm>
           <a:prstGeom prst="rect">
             <a:avLst/>
@@ -5048,8 +5048,8 @@
         </p:nvSpPr>
         <p:spPr>
           <a:xfrm>
-            <a:off x="590550" y="2495550"/>
-            <a:ext cx="1333500" cy="171450"/>
+            <a:off x="571500" y="1438275"/>
+            <a:ext cx="1314450" cy="171450"/>
           </a:xfrm>
           <a:prstGeom prst="rect">
             <a:avLst/>
@@ -5087,8 +5087,8 @@
         </p:nvSpPr>
         <p:spPr>
           <a:xfrm>
-            <a:off x="590550" y="2895600"/>
-            <a:ext cx="1333500" cy="1524000"/>
+            <a:off x="571500" y="1762125"/>
+            <a:ext cx="1314450" cy="609600"/>
           </a:xfrm>
           <a:prstGeom prst="rect">
             <a:avLst/>
@@ -5104,7 +5104,7 @@
               <a:buNone/>
             </a:pPr>
             <a:r>
-              <a:rPr lang="en-US" sz="4000" b="1" dirty="0">
+              <a:rPr lang="en-US" sz="2800" b="1" dirty="0">
                 <a:solidFill>
                   <a:srgbClr val="4E79A7"/>
                 </a:solidFill>
@@ -5114,7 +5114,7 @@
               </a:rPr>
               <a:t>&lt;150ms</a:t>
             </a:r>
-            <a:endParaRPr lang="en-US" sz="4000" dirty="0"/>
+            <a:endParaRPr lang="en-US" sz="2800" dirty="0"/>
           </a:p>
         </p:txBody>
       </p:sp>
@@ -5126,8 +5126,8 @@
         </p:nvSpPr>
         <p:spPr>
           <a:xfrm>
-            <a:off x="590550" y="4552950"/>
-            <a:ext cx="1333500" cy="381000"/>
+            <a:off x="571500" y="2466975"/>
+            <a:ext cx="1314450" cy="342900"/>
           </a:xfrm>
           <a:prstGeom prst="rect">
             <a:avLst/>
@@ -5143,7 +5143,7 @@
               <a:buNone/>
             </a:pPr>
             <a:r>
-              <a:rPr lang="en-US" sz="1300" dirty="0">
+              <a:rPr lang="en-US" sz="1200" dirty="0">
                 <a:solidFill>
                   <a:srgbClr val="6C6C8A"/>
                 </a:solidFill>
@@ -5153,7 +5153,7 @@
               </a:rPr>
               <a:t>p50 same region</a:t>
             </a:r>
-            <a:endParaRPr lang="en-US" sz="1300" dirty="0"/>
+            <a:endParaRPr lang="en-US" sz="1200" dirty="0"/>
           </a:p>
         </p:txBody>
       </p:sp>
@@ -5165,12 +5165,12 @@
         </p:nvSpPr>
         <p:spPr>
           <a:xfrm>
-            <a:off x="2343150" y="2247900"/>
-            <a:ext cx="1714500" cy="2857500"/>
+            <a:off x="2190750" y="1228725"/>
+            <a:ext cx="1657350" cy="1714500"/>
           </a:xfrm>
           <a:prstGeom prst="roundRect">
             <a:avLst>
-              <a:gd name="adj" fmla="val 5333"/>
+              <a:gd name="adj" fmla="val 5517"/>
             </a:avLst>
           </a:prstGeom>
           <a:solidFill>
@@ -5192,8 +5192,8 @@
         </p:nvSpPr>
         <p:spPr>
           <a:xfrm>
-            <a:off x="2343150" y="2247900"/>
-            <a:ext cx="1714500" cy="76200"/>
+            <a:off x="2190750" y="1228725"/>
+            <a:ext cx="1657350" cy="76200"/>
           </a:xfrm>
           <a:prstGeom prst="rect">
             <a:avLst/>
@@ -5217,8 +5217,8 @@
         </p:nvSpPr>
         <p:spPr>
           <a:xfrm>
-            <a:off x="2533650" y="2495550"/>
-            <a:ext cx="1333500" cy="171450"/>
+            <a:off x="2362200" y="1438275"/>
+            <a:ext cx="1314450" cy="171450"/>
           </a:xfrm>
           <a:prstGeom prst="rect">
             <a:avLst/>
@@ -5256,8 +5256,8 @@
         </p:nvSpPr>
         <p:spPr>
           <a:xfrm>
-            <a:off x="2533650" y="2895600"/>
-            <a:ext cx="1333500" cy="1524000"/>
+            <a:off x="2362200" y="1762125"/>
+            <a:ext cx="1314450" cy="609600"/>
           </a:xfrm>
           <a:prstGeom prst="rect">
             <a:avLst/>
@@ -5273,7 +5273,7 @@
               <a:buNone/>
             </a:pPr>
             <a:r>
-              <a:rPr lang="en-US" sz="4000" b="1" dirty="0">
+              <a:rPr lang="en-US" sz="2800" b="1" dirty="0">
                 <a:solidFill>
                   <a:srgbClr val="F28E2B"/>
                 </a:solidFill>
@@ -5283,7 +5283,7 @@
               </a:rPr>
               <a:t>&lt;2s</a:t>
             </a:r>
-            <a:endParaRPr lang="en-US" sz="4000" dirty="0"/>
+            <a:endParaRPr lang="en-US" sz="2800" dirty="0"/>
           </a:p>
         </p:txBody>
       </p:sp>
@@ -5295,8 +5295,8 @@
         </p:nvSpPr>
         <p:spPr>
           <a:xfrm>
-            <a:off x="2533650" y="4552950"/>
-            <a:ext cx="1333500" cy="381000"/>
+            <a:off x="2362200" y="2466975"/>
+            <a:ext cx="1314450" cy="342900"/>
           </a:xfrm>
           <a:prstGeom prst="rect">
             <a:avLst/>
@@ -5312,7 +5312,7 @@
               <a:buNone/>
             </a:pPr>
             <a:r>
-              <a:rPr lang="en-US" sz="1300" dirty="0">
+              <a:rPr lang="en-US" sz="1200" dirty="0">
                 <a:solidFill>
                   <a:srgbClr val="6C6C8A"/>
                 </a:solidFill>
@@ -5322,7 +5322,7 @@
               </a:rPr>
               <a:t>24h offline</a:t>
             </a:r>
-            <a:endParaRPr lang="en-US" sz="1300" dirty="0"/>
+            <a:endParaRPr lang="en-US" sz="1200" dirty="0"/>
           </a:p>
         </p:txBody>
       </p:sp>
@@ -5334,12 +5334,12 @@
         </p:nvSpPr>
         <p:spPr>
           <a:xfrm>
-            <a:off x="4286250" y="2247900"/>
-            <a:ext cx="1714500" cy="2857500"/>
+            <a:off x="3981450" y="1228725"/>
+            <a:ext cx="1657350" cy="1714500"/>
           </a:xfrm>
           <a:prstGeom prst="roundRect">
             <a:avLst>
-              <a:gd name="adj" fmla="val 5333"/>
+              <a:gd name="adj" fmla="val 5517"/>
             </a:avLst>
           </a:prstGeom>
           <a:solidFill>
@@ -5361,8 +5361,8 @@
         </p:nvSpPr>
         <p:spPr>
           <a:xfrm>
-            <a:off x="4286250" y="2247900"/>
-            <a:ext cx="1714500" cy="76200"/>
+            <a:off x="3981450" y="1228725"/>
+            <a:ext cx="1657350" cy="76200"/>
           </a:xfrm>
           <a:prstGeom prst="rect">
             <a:avLst/>
@@ -5386,8 +5386,8 @@
         </p:nvSpPr>
         <p:spPr>
           <a:xfrm>
-            <a:off x="4476750" y="2495550"/>
-            <a:ext cx="1333500" cy="171450"/>
+            <a:off x="4152900" y="1438275"/>
+            <a:ext cx="1314450" cy="171450"/>
           </a:xfrm>
           <a:prstGeom prst="rect">
             <a:avLst/>
@@ -5425,8 +5425,8 @@
         </p:nvSpPr>
         <p:spPr>
           <a:xfrm>
-            <a:off x="4476750" y="2895600"/>
-            <a:ext cx="1333500" cy="1524000"/>
+            <a:off x="4152900" y="1762125"/>
+            <a:ext cx="1314450" cy="609600"/>
           </a:xfrm>
           <a:prstGeom prst="rect">
             <a:avLst/>
@@ -5442,7 +5442,7 @@
               <a:buNone/>
             </a:pPr>
             <a:r>
-              <a:rPr lang="en-US" sz="4000" b="1" dirty="0">
+              <a:rPr lang="en-US" sz="2800" b="1" dirty="0">
                 <a:solidFill>
                   <a:srgbClr val="E15759"/>
                 </a:solidFill>
@@ -5452,7 +5452,7 @@
               </a:rPr>
               <a:t>1k</a:t>
             </a:r>
-            <a:endParaRPr lang="en-US" sz="4000" dirty="0"/>
+            <a:endParaRPr lang="en-US" sz="2800" dirty="0"/>
           </a:p>
         </p:txBody>
       </p:sp>
@@ -5464,8 +5464,8 @@
         </p:nvSpPr>
         <p:spPr>
           <a:xfrm>
-            <a:off x="4476750" y="4552950"/>
-            <a:ext cx="1333500" cy="381000"/>
+            <a:off x="4152900" y="2466975"/>
+            <a:ext cx="1314450" cy="342900"/>
           </a:xfrm>
           <a:prstGeom prst="rect">
             <a:avLst/>
@@ -5481,7 +5481,7 @@
               <a:buNone/>
             </a:pPr>
             <a:r>
-              <a:rPr lang="en-US" sz="1300" dirty="0">
+              <a:rPr lang="en-US" sz="1200" dirty="0">
                 <a:solidFill>
                   <a:srgbClr val="6C6C8A"/>
                 </a:solidFill>
@@ -5491,7 +5491,7 @@
               </a:rPr>
               <a:t>Members v1</a:t>
             </a:r>
-            <a:endParaRPr lang="en-US" sz="1300" dirty="0"/>
+            <a:endParaRPr lang="en-US" sz="1200" dirty="0"/>
           </a:p>
         </p:txBody>
       </p:sp>
@@ -5503,8 +5503,8 @@
         </p:nvSpPr>
         <p:spPr>
           <a:xfrm>
-            <a:off x="6172200" y="819150"/>
-            <a:ext cx="5619750" cy="171450"/>
+            <a:off x="5886450" y="962025"/>
+            <a:ext cx="5905500" cy="171450"/>
           </a:xfrm>
           <a:prstGeom prst="rect">
             <a:avLst/>
@@ -5542,12 +5542,12 @@
         </p:nvSpPr>
         <p:spPr>
           <a:xfrm>
-            <a:off x="6172200" y="1028700"/>
-            <a:ext cx="1743075" cy="5295900"/>
+            <a:off x="5886450" y="1228725"/>
+            <a:ext cx="5905500" cy="1571625"/>
           </a:xfrm>
           <a:prstGeom prst="roundRect">
             <a:avLst>
-              <a:gd name="adj" fmla="val 5246"/>
+              <a:gd name="adj" fmla="val 5818"/>
             </a:avLst>
           </a:prstGeom>
           <a:solidFill>
@@ -5569,8 +5569,8 @@
         </p:nvSpPr>
         <p:spPr>
           <a:xfrm>
-            <a:off x="6172200" y="1028700"/>
-            <a:ext cx="57150" cy="5295900"/>
+            <a:off x="5886450" y="1228725"/>
+            <a:ext cx="57150" cy="1571625"/>
           </a:xfrm>
           <a:prstGeom prst="rect">
             <a:avLst/>
@@ -5594,8 +5594,8 @@
         </p:nvSpPr>
         <p:spPr>
           <a:xfrm>
-            <a:off x="6343650" y="1181100"/>
-            <a:ext cx="1400175" cy="171450"/>
+            <a:off x="6057900" y="1343025"/>
+            <a:ext cx="5562600" cy="171450"/>
           </a:xfrm>
           <a:prstGeom prst="rect">
             <a:avLst/>
@@ -5633,8 +5633,8 @@
         </p:nvSpPr>
         <p:spPr>
           <a:xfrm>
-            <a:off x="6343650" y="1447800"/>
-            <a:ext cx="1400175" cy="4724400"/>
+            <a:off x="6057900" y="1609725"/>
+            <a:ext cx="5562600" cy="1076325"/>
           </a:xfrm>
           <a:prstGeom prst="rect">
             <a:avLst/>
@@ -5650,7 +5650,7 @@
               <a:buNone/>
             </a:pPr>
             <a:r>
-              <a:rPr lang="en-US" sz="1800" b="1" dirty="0">
+              <a:rPr lang="en-US" sz="1600" b="1" dirty="0">
                 <a:solidFill>
                   <a:srgbClr val="EAEAEA"/>
                 </a:solidFill>
@@ -5660,7 +5660,7 @@
               </a:rPr>
               <a:t>Text, react, reply, delete</a:t>
             </a:r>
-            <a:endParaRPr lang="en-US" sz="1800" dirty="0"/>
+            <a:endParaRPr lang="en-US" sz="1600" dirty="0"/>
           </a:p>
         </p:txBody>
       </p:sp>
@@ -5672,12 +5672,12 @@
         </p:nvSpPr>
         <p:spPr>
           <a:xfrm>
-            <a:off x="8105775" y="1028700"/>
-            <a:ext cx="1743075" cy="5295900"/>
+            <a:off x="5886450" y="2990850"/>
+            <a:ext cx="5905500" cy="1571625"/>
           </a:xfrm>
           <a:prstGeom prst="roundRect">
             <a:avLst>
-              <a:gd name="adj" fmla="val 5246"/>
+              <a:gd name="adj" fmla="val 5818"/>
             </a:avLst>
           </a:prstGeom>
           <a:solidFill>
@@ -5699,8 +5699,8 @@
         </p:nvSpPr>
         <p:spPr>
           <a:xfrm>
-            <a:off x="8105775" y="1028700"/>
-            <a:ext cx="57150" cy="5295900"/>
+            <a:off x="5886450" y="2990850"/>
+            <a:ext cx="57150" cy="1571625"/>
           </a:xfrm>
           <a:prstGeom prst="rect">
             <a:avLst/>
@@ -5724,8 +5724,8 @@
         </p:nvSpPr>
         <p:spPr>
           <a:xfrm>
-            <a:off x="8277225" y="1181100"/>
-            <a:ext cx="1400175" cy="171450"/>
+            <a:off x="6057900" y="3105150"/>
+            <a:ext cx="5562600" cy="171450"/>
           </a:xfrm>
           <a:prstGeom prst="rect">
             <a:avLst/>
@@ -5763,8 +5763,8 @@
         </p:nvSpPr>
         <p:spPr>
           <a:xfrm>
-            <a:off x="8277225" y="1447800"/>
-            <a:ext cx="1400175" cy="4724400"/>
+            <a:off x="6057900" y="3371850"/>
+            <a:ext cx="5562600" cy="1076325"/>
           </a:xfrm>
           <a:prstGeom prst="rect">
             <a:avLst/>
@@ -5780,7 +5780,7 @@
               <a:buNone/>
             </a:pPr>
             <a:r>
-              <a:rPr lang="en-US" sz="1800" b="1" dirty="0">
+              <a:rPr lang="en-US" sz="1600" b="1" dirty="0">
                 <a:solidFill>
                   <a:srgbClr val="EAEAEA"/>
                 </a:solidFill>
@@ -5790,7 +5790,7 @@
               </a:rPr>
               <a:t>Admin roles, mentions, invites</a:t>
             </a:r>
-            <a:endParaRPr lang="en-US" sz="1800" dirty="0"/>
+            <a:endParaRPr lang="en-US" sz="1600" dirty="0"/>
           </a:p>
         </p:txBody>
       </p:sp>
@@ -5802,12 +5802,12 @@
         </p:nvSpPr>
         <p:spPr>
           <a:xfrm>
-            <a:off x="10039350" y="1028700"/>
-            <a:ext cx="1743075" cy="5295900"/>
+            <a:off x="5886450" y="4752975"/>
+            <a:ext cx="5905500" cy="1571625"/>
           </a:xfrm>
           <a:prstGeom prst="roundRect">
             <a:avLst>
-              <a:gd name="adj" fmla="val 5246"/>
+              <a:gd name="adj" fmla="val 5818"/>
             </a:avLst>
           </a:prstGeom>
           <a:solidFill>
@@ -5829,8 +5829,8 @@
         </p:nvSpPr>
         <p:spPr>
           <a:xfrm>
-            <a:off x="10039350" y="1028700"/>
-            <a:ext cx="57150" cy="5295900"/>
+            <a:off x="5886450" y="4752975"/>
+            <a:ext cx="57150" cy="1571625"/>
           </a:xfrm>
           <a:prstGeom prst="rect">
             <a:avLst/>
@@ -5854,8 +5854,8 @@
         </p:nvSpPr>
         <p:spPr>
           <a:xfrm>
-            <a:off x="10210800" y="1181100"/>
-            <a:ext cx="1400175" cy="171450"/>
+            <a:off x="6057900" y="4867275"/>
+            <a:ext cx="5562600" cy="171450"/>
           </a:xfrm>
           <a:prstGeom prst="rect">
             <a:avLst/>
@@ -5893,8 +5893,8 @@
         </p:nvSpPr>
         <p:spPr>
           <a:xfrm>
-            <a:off x="10210800" y="1447800"/>
-            <a:ext cx="1400175" cy="4724400"/>
+            <a:off x="6057900" y="5133975"/>
+            <a:ext cx="5562600" cy="1076325"/>
           </a:xfrm>
           <a:prstGeom prst="rect">
             <a:avLst/>
@@ -5910,7 +5910,7 @@
               <a:buNone/>
             </a:pPr>
             <a:r>
-              <a:rPr lang="en-US" sz="1800" b="1" dirty="0">
+              <a:rPr lang="en-US" sz="1600" b="1" dirty="0">
                 <a:solidFill>
                   <a:srgbClr val="EAEAEA"/>
                 </a:solidFill>
@@ -5920,7 +5920,7 @@
               </a:rPr>
               <a:t>Images, video, voice, docs</a:t>
             </a:r>
-            <a:endParaRPr lang="en-US" sz="1800" dirty="0"/>
+            <a:endParaRPr lang="en-US" sz="1600" dirty="0"/>
           </a:p>
         </p:txBody>
       </p:sp>
@@ -5995,7 +5995,7 @@
         <p:spPr>
           <a:xfrm>
             <a:off x="400050" y="247650"/>
-            <a:ext cx="10839450" cy="381000"/>
+            <a:ext cx="10839450" cy="428625"/>
           </a:xfrm>
           <a:prstGeom prst="rect">
             <a:avLst/>
@@ -6011,7 +6011,7 @@
               <a:buNone/>
             </a:pPr>
             <a:r>
-              <a:rPr lang="en-US" sz="3000" b="1" dirty="0">
+              <a:rPr lang="en-US" sz="3200" b="1" dirty="0">
                 <a:solidFill>
                   <a:srgbClr val="EAEAEA"/>
                 </a:solidFill>
@@ -6021,7 +6021,7 @@
               </a:rPr>
               <a:t>Non-functional requirements</a:t>
             </a:r>
-            <a:endParaRPr lang="en-US" sz="3000" dirty="0"/>
+            <a:endParaRPr lang="en-US" sz="3200" dirty="0"/>
           </a:p>
         </p:txBody>
       </p:sp>
@@ -6111,12 +6111,12 @@
         </p:nvSpPr>
         <p:spPr>
           <a:xfrm>
-            <a:off x="400050" y="781050"/>
-            <a:ext cx="11391900" cy="1314450"/>
+            <a:off x="400050" y="904875"/>
+            <a:ext cx="11391900" cy="1276350"/>
           </a:xfrm>
           <a:prstGeom prst="roundRect">
             <a:avLst>
-              <a:gd name="adj" fmla="val 6957"/>
+              <a:gd name="adj" fmla="val 7164"/>
             </a:avLst>
           </a:prstGeom>
           <a:solidFill>
@@ -6138,8 +6138,8 @@
         </p:nvSpPr>
         <p:spPr>
           <a:xfrm>
-            <a:off x="400050" y="781050"/>
-            <a:ext cx="114300" cy="1314450"/>
+            <a:off x="400050" y="904875"/>
+            <a:ext cx="114300" cy="1276350"/>
           </a:xfrm>
           <a:prstGeom prst="rect">
             <a:avLst/>
@@ -6163,8 +6163,8 @@
         </p:nvSpPr>
         <p:spPr>
           <a:xfrm>
-            <a:off x="704850" y="895350"/>
-            <a:ext cx="5126355" cy="266700"/>
+            <a:off x="666750" y="1438275"/>
+            <a:ext cx="4328922" cy="209550"/>
           </a:xfrm>
           <a:prstGeom prst="rect">
             <a:avLst/>
@@ -6180,7 +6180,7 @@
               <a:buNone/>
             </a:pPr>
             <a:r>
-              <a:rPr lang="en-US" sz="1800" b="1" dirty="0">
+              <a:rPr lang="en-US" sz="1600" b="1" dirty="0">
                 <a:solidFill>
                   <a:srgbClr val="EAEAEA"/>
                 </a:solidFill>
@@ -6190,7 +6190,7 @@
               </a:rPr>
               <a:t>Security</a:t>
             </a:r>
-            <a:endParaRPr lang="en-US" sz="1800" dirty="0"/>
+            <a:endParaRPr lang="en-US" sz="1600" dirty="0"/>
           </a:p>
         </p:txBody>
       </p:sp>
@@ -6202,8 +6202,8 @@
         </p:nvSpPr>
         <p:spPr>
           <a:xfrm>
-            <a:off x="5184648" y="904875"/>
-            <a:ext cx="5923788" cy="266700"/>
+            <a:off x="4956810" y="1438275"/>
+            <a:ext cx="6265545" cy="209550"/>
           </a:xfrm>
           <a:prstGeom prst="rect">
             <a:avLst/>
@@ -6219,7 +6219,7 @@
               <a:buNone/>
             </a:pPr>
             <a:r>
-              <a:rPr lang="en-US" sz="1600" dirty="0">
+              <a:rPr lang="en-US" sz="1400" dirty="0">
                 <a:solidFill>
                   <a:srgbClr val="6C6C8A"/>
                 </a:solidFill>
@@ -6229,7 +6229,7 @@
               </a:rPr>
               <a:t>E2EE 1:1; group E2EE roadmap; device verification</a:t>
             </a:r>
-            <a:endParaRPr lang="en-US" sz="1600" dirty="0"/>
+            <a:endParaRPr lang="en-US" sz="1400" dirty="0"/>
           </a:p>
         </p:txBody>
       </p:sp>
@@ -6241,12 +6241,12 @@
         </p:nvSpPr>
         <p:spPr>
           <a:xfrm>
-            <a:off x="400050" y="2190750"/>
-            <a:ext cx="11391900" cy="1314450"/>
+            <a:off x="400050" y="2276475"/>
+            <a:ext cx="11391900" cy="1276350"/>
           </a:xfrm>
           <a:prstGeom prst="roundRect">
             <a:avLst>
-              <a:gd name="adj" fmla="val 6957"/>
+              <a:gd name="adj" fmla="val 7164"/>
             </a:avLst>
           </a:prstGeom>
           <a:solidFill>
@@ -6268,8 +6268,8 @@
         </p:nvSpPr>
         <p:spPr>
           <a:xfrm>
-            <a:off x="400050" y="2190750"/>
-            <a:ext cx="114300" cy="1314450"/>
+            <a:off x="400050" y="2276475"/>
+            <a:ext cx="114300" cy="1276350"/>
           </a:xfrm>
           <a:prstGeom prst="rect">
             <a:avLst/>
@@ -6293,8 +6293,8 @@
         </p:nvSpPr>
         <p:spPr>
           <a:xfrm>
-            <a:off x="704850" y="2305050"/>
-            <a:ext cx="5126355" cy="266700"/>
+            <a:off x="666750" y="2809875"/>
+            <a:ext cx="4328922" cy="209550"/>
           </a:xfrm>
           <a:prstGeom prst="rect">
             <a:avLst/>
@@ -6310,7 +6310,7 @@
               <a:buNone/>
             </a:pPr>
             <a:r>
-              <a:rPr lang="en-US" sz="1800" b="1" dirty="0">
+              <a:rPr lang="en-US" sz="1600" b="1" dirty="0">
                 <a:solidFill>
                   <a:srgbClr val="EAEAEA"/>
                 </a:solidFill>
@@ -6320,7 +6320,7 @@
               </a:rPr>
               <a:t>Availability</a:t>
             </a:r>
-            <a:endParaRPr lang="en-US" sz="1800" dirty="0"/>
+            <a:endParaRPr lang="en-US" sz="1600" dirty="0"/>
           </a:p>
         </p:txBody>
       </p:sp>
@@ -6332,8 +6332,8 @@
         </p:nvSpPr>
         <p:spPr>
           <a:xfrm>
-            <a:off x="5184648" y="2314575"/>
-            <a:ext cx="5923788" cy="266700"/>
+            <a:off x="4956810" y="2809875"/>
+            <a:ext cx="6265545" cy="209550"/>
           </a:xfrm>
           <a:prstGeom prst="rect">
             <a:avLst/>
@@ -6349,7 +6349,7 @@
               <a:buNone/>
             </a:pPr>
             <a:r>
-              <a:rPr lang="en-US" sz="1600" dirty="0">
+              <a:rPr lang="en-US" sz="1400" dirty="0">
                 <a:solidFill>
                   <a:srgbClr val="6C6C8A"/>
                 </a:solidFill>
@@ -6359,7 +6359,7 @@
               </a:rPr>
               <a:t>99.95% message API; multi-AZ</a:t>
             </a:r>
-            <a:endParaRPr lang="en-US" sz="1600" dirty="0"/>
+            <a:endParaRPr lang="en-US" sz="1400" dirty="0"/>
           </a:p>
         </p:txBody>
       </p:sp>
@@ -6371,12 +6371,12 @@
         </p:nvSpPr>
         <p:spPr>
           <a:xfrm>
-            <a:off x="400050" y="3600450"/>
-            <a:ext cx="11391900" cy="1314450"/>
+            <a:off x="400050" y="3648075"/>
+            <a:ext cx="11391900" cy="1276350"/>
           </a:xfrm>
           <a:prstGeom prst="roundRect">
             <a:avLst>
-              <a:gd name="adj" fmla="val 6957"/>
+              <a:gd name="adj" fmla="val 7164"/>
             </a:avLst>
           </a:prstGeom>
           <a:solidFill>
@@ -6398,8 +6398,8 @@
         </p:nvSpPr>
         <p:spPr>
           <a:xfrm>
-            <a:off x="400050" y="3600450"/>
-            <a:ext cx="114300" cy="1314450"/>
+            <a:off x="400050" y="3648075"/>
+            <a:ext cx="114300" cy="1276350"/>
           </a:xfrm>
           <a:prstGeom prst="rect">
             <a:avLst/>
@@ -6423,8 +6423,8 @@
         </p:nvSpPr>
         <p:spPr>
           <a:xfrm>
-            <a:off x="704850" y="3714750"/>
-            <a:ext cx="5126355" cy="266700"/>
+            <a:off x="666750" y="4181475"/>
+            <a:ext cx="4328922" cy="209550"/>
           </a:xfrm>
           <a:prstGeom prst="rect">
             <a:avLst/>
@@ -6440,7 +6440,7 @@
               <a:buNone/>
             </a:pPr>
             <a:r>
-              <a:rPr lang="en-US" sz="1800" b="1" dirty="0">
+              <a:rPr lang="en-US" sz="1600" b="1" dirty="0">
                 <a:solidFill>
                   <a:srgbClr val="EAEAEA"/>
                 </a:solidFill>
@@ -6450,7 +6450,7 @@
               </a:rPr>
               <a:t>Scale</a:t>
             </a:r>
-            <a:endParaRPr lang="en-US" sz="1800" dirty="0"/>
+            <a:endParaRPr lang="en-US" sz="1600" dirty="0"/>
           </a:p>
         </p:txBody>
       </p:sp>
@@ -6462,8 +6462,8 @@
         </p:nvSpPr>
         <p:spPr>
           <a:xfrm>
-            <a:off x="5184648" y="3724275"/>
-            <a:ext cx="5923788" cy="266700"/>
+            <a:off x="4956810" y="4181475"/>
+            <a:ext cx="6265545" cy="209550"/>
           </a:xfrm>
           <a:prstGeom prst="rect">
             <a:avLst/>
@@ -6479,7 +6479,7 @@
               <a:buNone/>
             </a:pPr>
             <a:r>
-              <a:rPr lang="en-US" sz="1600" dirty="0">
+              <a:rPr lang="en-US" sz="1400" dirty="0">
                 <a:solidFill>
                   <a:srgbClr val="6C6C8A"/>
                 </a:solidFill>
@@ -6489,7 +6489,7 @@
               </a:rPr>
               <a:t>10M MAU year-1; horizontal message plane</a:t>
             </a:r>
-            <a:endParaRPr lang="en-US" sz="1600" dirty="0"/>
+            <a:endParaRPr lang="en-US" sz="1400" dirty="0"/>
           </a:p>
         </p:txBody>
       </p:sp>
@@ -6501,12 +6501,12 @@
         </p:nvSpPr>
         <p:spPr>
           <a:xfrm>
-            <a:off x="400050" y="5010150"/>
-            <a:ext cx="11391900" cy="1314450"/>
+            <a:off x="400050" y="5019675"/>
+            <a:ext cx="11391900" cy="1276350"/>
           </a:xfrm>
           <a:prstGeom prst="roundRect">
             <a:avLst>
-              <a:gd name="adj" fmla="val 6957"/>
+              <a:gd name="adj" fmla="val 7164"/>
             </a:avLst>
           </a:prstGeom>
           <a:solidFill>
@@ -6528,8 +6528,8 @@
         </p:nvSpPr>
         <p:spPr>
           <a:xfrm>
-            <a:off x="400050" y="5010150"/>
-            <a:ext cx="114300" cy="1314450"/>
+            <a:off x="400050" y="5019675"/>
+            <a:ext cx="114300" cy="1276350"/>
           </a:xfrm>
           <a:prstGeom prst="rect">
             <a:avLst/>
@@ -6553,8 +6553,8 @@
         </p:nvSpPr>
         <p:spPr>
           <a:xfrm>
-            <a:off x="704850" y="5124450"/>
-            <a:ext cx="5126355" cy="266700"/>
+            <a:off x="666750" y="5553075"/>
+            <a:ext cx="4328922" cy="209550"/>
           </a:xfrm>
           <a:prstGeom prst="rect">
             <a:avLst/>
@@ -6570,7 +6570,7 @@
               <a:buNone/>
             </a:pPr>
             <a:r>
-              <a:rPr lang="en-US" sz="1800" b="1" dirty="0">
+              <a:rPr lang="en-US" sz="1600" b="1" dirty="0">
                 <a:solidFill>
                   <a:srgbClr val="EAEAEA"/>
                 </a:solidFill>
@@ -6580,7 +6580,7 @@
               </a:rPr>
               <a:t>Compliance</a:t>
             </a:r>
-            <a:endParaRPr lang="en-US" sz="1800" dirty="0"/>
+            <a:endParaRPr lang="en-US" sz="1600" dirty="0"/>
           </a:p>
         </p:txBody>
       </p:sp>
@@ -6592,8 +6592,8 @@
         </p:nvSpPr>
         <p:spPr>
           <a:xfrm>
-            <a:off x="5184648" y="5133975"/>
-            <a:ext cx="5923788" cy="266700"/>
+            <a:off x="4956810" y="5553075"/>
+            <a:ext cx="6265545" cy="209550"/>
           </a:xfrm>
           <a:prstGeom prst="rect">
             <a:avLst/>
@@ -6609,7 +6609,7 @@
               <a:buNone/>
             </a:pPr>
             <a:r>
-              <a:rPr lang="en-US" sz="1600" dirty="0">
+              <a:rPr lang="en-US" sz="1400" dirty="0">
                 <a:solidFill>
                   <a:srgbClr val="6C6C8A"/>
                 </a:solidFill>
@@ -6619,7 +6619,7 @@
               </a:rPr>
               <a:t>Age gates, report/block, regional data controls</a:t>
             </a:r>
-            <a:endParaRPr lang="en-US" sz="1600" dirty="0"/>
+            <a:endParaRPr lang="en-US" sz="1400" dirty="0"/>
           </a:p>
         </p:txBody>
       </p:sp>
@@ -6694,7 +6694,7 @@
         <p:spPr>
           <a:xfrm>
             <a:off x="400050" y="247650"/>
-            <a:ext cx="10839450" cy="381000"/>
+            <a:ext cx="10839450" cy="428625"/>
           </a:xfrm>
           <a:prstGeom prst="rect">
             <a:avLst/>
@@ -6710,7 +6710,7 @@
               <a:buNone/>
             </a:pPr>
             <a:r>
-              <a:rPr lang="en-US" sz="3000" b="1" dirty="0">
+              <a:rPr lang="en-US" sz="3200" b="1" dirty="0">
                 <a:solidFill>
                   <a:srgbClr val="EAEAEA"/>
                 </a:solidFill>
@@ -6720,7 +6720,7 @@
               </a:rPr>
               <a:t>Scope and message path</a:t>
             </a:r>
-            <a:endParaRPr lang="en-US" sz="3000" dirty="0"/>
+            <a:endParaRPr lang="en-US" sz="3200" dirty="0"/>
           </a:p>
         </p:txBody>
       </p:sp>
@@ -6810,8 +6810,8 @@
         </p:nvSpPr>
         <p:spPr>
           <a:xfrm>
-            <a:off x="400050" y="819150"/>
-            <a:ext cx="11391900" cy="171450"/>
+            <a:off x="400050" y="962025"/>
+            <a:ext cx="6753225" cy="171450"/>
           </a:xfrm>
           <a:prstGeom prst="rect">
             <a:avLst/>
@@ -6849,12 +6849,12 @@
         </p:nvSpPr>
         <p:spPr>
           <a:xfrm>
-            <a:off x="1543050" y="1143000"/>
-            <a:ext cx="4933950" cy="904875"/>
+            <a:off x="1085850" y="1266825"/>
+            <a:ext cx="2928938" cy="2290763"/>
           </a:xfrm>
           <a:prstGeom prst="roundRect">
             <a:avLst>
-              <a:gd name="adj" fmla="val 10105"/>
+              <a:gd name="adj" fmla="val 3992"/>
             </a:avLst>
           </a:prstGeom>
           <a:solidFill>
@@ -6876,12 +6876,12 @@
         </p:nvSpPr>
         <p:spPr>
           <a:xfrm>
-            <a:off x="6572250" y="1143000"/>
-            <a:ext cx="4933950" cy="904875"/>
+            <a:off x="4110038" y="1266825"/>
+            <a:ext cx="2928938" cy="2290763"/>
           </a:xfrm>
           <a:prstGeom prst="roundRect">
             <a:avLst>
-              <a:gd name="adj" fmla="val 10105"/>
+              <a:gd name="adj" fmla="val 3992"/>
             </a:avLst>
           </a:prstGeom>
           <a:solidFill>
@@ -6903,12 +6903,12 @@
         </p:nvSpPr>
         <p:spPr>
           <a:xfrm>
-            <a:off x="1543050" y="2143125"/>
-            <a:ext cx="4933950" cy="904875"/>
+            <a:off x="1085850" y="3652838"/>
+            <a:ext cx="2928938" cy="2290763"/>
           </a:xfrm>
           <a:prstGeom prst="roundRect">
             <a:avLst>
-              <a:gd name="adj" fmla="val 10105"/>
+              <a:gd name="adj" fmla="val 3992"/>
             </a:avLst>
           </a:prstGeom>
           <a:solidFill>
@@ -6930,12 +6930,12 @@
         </p:nvSpPr>
         <p:spPr>
           <a:xfrm>
-            <a:off x="6572250" y="2143125"/>
-            <a:ext cx="4933950" cy="904875"/>
+            <a:off x="4110038" y="3652838"/>
+            <a:ext cx="2928938" cy="2290763"/>
           </a:xfrm>
           <a:prstGeom prst="roundRect">
             <a:avLst>
-              <a:gd name="adj" fmla="val 10105"/>
+              <a:gd name="adj" fmla="val 3992"/>
             </a:avLst>
           </a:prstGeom>
           <a:solidFill>
@@ -6957,8 +6957,8 @@
         </p:nvSpPr>
         <p:spPr>
           <a:xfrm>
-            <a:off x="400050" y="1143000"/>
-            <a:ext cx="1047750" cy="266700"/>
+            <a:off x="400050" y="1266825"/>
+            <a:ext cx="628650" cy="266700"/>
           </a:xfrm>
           <a:prstGeom prst="rect">
             <a:avLst/>
@@ -6996,8 +6996,8 @@
         </p:nvSpPr>
         <p:spPr>
           <a:xfrm>
-            <a:off x="1543050" y="3200400"/>
-            <a:ext cx="9963150" cy="266700"/>
+            <a:off x="1085850" y="6000750"/>
+            <a:ext cx="5953125" cy="228600"/>
           </a:xfrm>
           <a:prstGeom prst="rect">
             <a:avLst/>
@@ -7035,8 +7035,8 @@
         </p:nvSpPr>
         <p:spPr>
           <a:xfrm>
-            <a:off x="1695450" y="1276350"/>
-            <a:ext cx="4629150" cy="171450"/>
+            <a:off x="1238250" y="1400175"/>
+            <a:ext cx="2624138" cy="171450"/>
           </a:xfrm>
           <a:prstGeom prst="rect">
             <a:avLst/>
@@ -7074,8 +7074,8 @@
         </p:nvSpPr>
         <p:spPr>
           <a:xfrm>
-            <a:off x="6724650" y="1276350"/>
-            <a:ext cx="4629150" cy="171450"/>
+            <a:off x="4262438" y="1400175"/>
+            <a:ext cx="2624138" cy="171450"/>
           </a:xfrm>
           <a:prstGeom prst="rect">
             <a:avLst/>
@@ -7113,8 +7113,8 @@
         </p:nvSpPr>
         <p:spPr>
           <a:xfrm>
-            <a:off x="1695450" y="2276475"/>
-            <a:ext cx="4629150" cy="171450"/>
+            <a:off x="1238250" y="3786188"/>
+            <a:ext cx="2624138" cy="171450"/>
           </a:xfrm>
           <a:prstGeom prst="rect">
             <a:avLst/>
@@ -7152,8 +7152,8 @@
         </p:nvSpPr>
         <p:spPr>
           <a:xfrm>
-            <a:off x="6724650" y="2276475"/>
-            <a:ext cx="4629150" cy="171450"/>
+            <a:off x="4262438" y="3786188"/>
+            <a:ext cx="2624138" cy="171450"/>
           </a:xfrm>
           <a:prstGeom prst="rect">
             <a:avLst/>
@@ -7191,12 +7191,12 @@
         </p:nvSpPr>
         <p:spPr>
           <a:xfrm>
-            <a:off x="1695450" y="1562100"/>
-            <a:ext cx="4629150" cy="342900"/>
+            <a:off x="1200150" y="1685925"/>
+            <a:ext cx="2700338" cy="400050"/>
           </a:xfrm>
           <a:prstGeom prst="roundRect">
             <a:avLst>
-              <a:gd name="adj" fmla="val 26667"/>
+              <a:gd name="adj" fmla="val 22857"/>
             </a:avLst>
           </a:prstGeom>
           <a:solidFill>
@@ -7218,8 +7218,8 @@
         </p:nvSpPr>
         <p:spPr>
           <a:xfrm>
-            <a:off x="1809750" y="1562100"/>
-            <a:ext cx="4400550" cy="342900"/>
+            <a:off x="1295400" y="1685925"/>
+            <a:ext cx="2509838" cy="400050"/>
           </a:xfrm>
           <a:prstGeom prst="rect">
             <a:avLst/>
@@ -7235,7 +7235,7 @@
               <a:buNone/>
             </a:pPr>
             <a:r>
-              <a:rPr lang="en-US" sz="1600" b="1" dirty="0">
+              <a:rPr lang="en-US" sz="1500" b="1" dirty="0">
                 <a:solidFill>
                   <a:srgbClr val="EAEAEA"/>
                 </a:solidFill>
@@ -7245,7 +7245,7 @@
               </a:rPr>
               <a:t>Status/stories</a:t>
             </a:r>
-            <a:endParaRPr lang="en-US" sz="1600" dirty="0"/>
+            <a:endParaRPr lang="en-US" sz="1500" dirty="0"/>
           </a:p>
         </p:txBody>
       </p:sp>
@@ -7257,12 +7257,12 @@
         </p:nvSpPr>
         <p:spPr>
           <a:xfrm>
-            <a:off x="6724650" y="1562100"/>
-            <a:ext cx="4629150" cy="342900"/>
+            <a:off x="4224338" y="1685925"/>
+            <a:ext cx="2700338" cy="400050"/>
           </a:xfrm>
           <a:prstGeom prst="roundRect">
             <a:avLst>
-              <a:gd name="adj" fmla="val 26667"/>
+              <a:gd name="adj" fmla="val 22857"/>
             </a:avLst>
           </a:prstGeom>
           <a:solidFill>
@@ -7284,8 +7284,8 @@
         </p:nvSpPr>
         <p:spPr>
           <a:xfrm>
-            <a:off x="6838950" y="1562100"/>
-            <a:ext cx="4400550" cy="342900"/>
+            <a:off x="4319588" y="1685925"/>
+            <a:ext cx="2509838" cy="400050"/>
           </a:xfrm>
           <a:prstGeom prst="rect">
             <a:avLst/>
@@ -7301,7 +7301,7 @@
               <a:buNone/>
             </a:pPr>
             <a:r>
-              <a:rPr lang="en-US" sz="1600" b="1" dirty="0">
+              <a:rPr lang="en-US" sz="1500" b="1" dirty="0">
                 <a:solidFill>
                   <a:srgbClr val="EAEAEA"/>
                 </a:solidFill>
@@ -7311,7 +7311,7 @@
               </a:rPr>
               <a:t>1:1 + receipts</a:t>
             </a:r>
-            <a:endParaRPr lang="en-US" sz="1600" dirty="0"/>
+            <a:endParaRPr lang="en-US" sz="1500" dirty="0"/>
           </a:p>
         </p:txBody>
       </p:sp>
@@ -7323,12 +7323,12 @@
         </p:nvSpPr>
         <p:spPr>
           <a:xfrm>
-            <a:off x="6724650" y="1733550"/>
-            <a:ext cx="4629150" cy="342900"/>
+            <a:off x="4224338" y="2143125"/>
+            <a:ext cx="2700338" cy="400050"/>
           </a:xfrm>
           <a:prstGeom prst="roundRect">
             <a:avLst>
-              <a:gd name="adj" fmla="val 26667"/>
+              <a:gd name="adj" fmla="val 22857"/>
             </a:avLst>
           </a:prstGeom>
           <a:solidFill>
@@ -7350,8 +7350,8 @@
         </p:nvSpPr>
         <p:spPr>
           <a:xfrm>
-            <a:off x="6838950" y="1733550"/>
-            <a:ext cx="4400550" cy="342900"/>
+            <a:off x="4319588" y="2143125"/>
+            <a:ext cx="2509838" cy="400050"/>
           </a:xfrm>
           <a:prstGeom prst="rect">
             <a:avLst/>
@@ -7367,7 +7367,7 @@
               <a:buNone/>
             </a:pPr>
             <a:r>
-              <a:rPr lang="en-US" sz="1600" b="1" dirty="0">
+              <a:rPr lang="en-US" sz="1500" b="1" dirty="0">
                 <a:solidFill>
                   <a:srgbClr val="EAEAEA"/>
                 </a:solidFill>
@@ -7377,7 +7377,7 @@
               </a:rPr>
               <a:t>Groups 1k</a:t>
             </a:r>
-            <a:endParaRPr lang="en-US" sz="1600" dirty="0"/>
+            <a:endParaRPr lang="en-US" sz="1500" dirty="0"/>
           </a:p>
         </p:txBody>
       </p:sp>
@@ -7389,12 +7389,12 @@
         </p:nvSpPr>
         <p:spPr>
           <a:xfrm>
-            <a:off x="1695450" y="2562225"/>
-            <a:ext cx="4629150" cy="342900"/>
+            <a:off x="1200150" y="4071938"/>
+            <a:ext cx="2700338" cy="400050"/>
           </a:xfrm>
           <a:prstGeom prst="roundRect">
             <a:avLst>
-              <a:gd name="adj" fmla="val 26667"/>
+              <a:gd name="adj" fmla="val 22857"/>
             </a:avLst>
           </a:prstGeom>
           <a:solidFill>
@@ -7416,8 +7416,8 @@
         </p:nvSpPr>
         <p:spPr>
           <a:xfrm>
-            <a:off x="1809750" y="2562225"/>
-            <a:ext cx="4400550" cy="342900"/>
+            <a:off x="1295400" y="4071938"/>
+            <a:ext cx="2509838" cy="400050"/>
           </a:xfrm>
           <a:prstGeom prst="rect">
             <a:avLst/>
@@ -7433,7 +7433,7 @@
               <a:buNone/>
             </a:pPr>
             <a:r>
-              <a:rPr lang="en-US" sz="1600" b="1" dirty="0">
+              <a:rPr lang="en-US" sz="1500" b="1" dirty="0">
                 <a:solidFill>
                   <a:srgbClr val="EAEAEA"/>
                 </a:solidFill>
@@ -7443,7 +7443,7 @@
               </a:rPr>
               <a:t>Payments</a:t>
             </a:r>
-            <a:endParaRPr lang="en-US" sz="1600" dirty="0"/>
+            <a:endParaRPr lang="en-US" sz="1500" dirty="0"/>
           </a:p>
         </p:txBody>
       </p:sp>
@@ -7455,8 +7455,8 @@
         </p:nvSpPr>
         <p:spPr>
           <a:xfrm>
-            <a:off x="400050" y="3543300"/>
-            <a:ext cx="11391900" cy="171450"/>
+            <a:off x="7381875" y="962025"/>
+            <a:ext cx="4410075" cy="171450"/>
           </a:xfrm>
           <a:prstGeom prst="rect">
             <a:avLst/>
@@ -7494,12 +7494,12 @@
         </p:nvSpPr>
         <p:spPr>
           <a:xfrm>
-            <a:off x="400050" y="3752850"/>
-            <a:ext cx="2714625" cy="2571750"/>
+            <a:off x="7381875" y="1228725"/>
+            <a:ext cx="4410075" cy="838200"/>
           </a:xfrm>
           <a:prstGeom prst="roundRect">
             <a:avLst>
-              <a:gd name="adj" fmla="val 3556"/>
+              <a:gd name="adj" fmla="val 10909"/>
             </a:avLst>
           </a:prstGeom>
           <a:solidFill>
@@ -7521,8 +7521,8 @@
         </p:nvSpPr>
         <p:spPr>
           <a:xfrm>
-            <a:off x="400050" y="3752850"/>
-            <a:ext cx="57150" cy="2571750"/>
+            <a:off x="7381875" y="1228725"/>
+            <a:ext cx="57150" cy="838200"/>
           </a:xfrm>
           <a:prstGeom prst="rect">
             <a:avLst/>
@@ -7546,8 +7546,8 @@
         </p:nvSpPr>
         <p:spPr>
           <a:xfrm>
-            <a:off x="571500" y="3905250"/>
-            <a:ext cx="2371725" cy="171450"/>
+            <a:off x="7553325" y="1343025"/>
+            <a:ext cx="4067175" cy="171450"/>
           </a:xfrm>
           <a:prstGeom prst="rect">
             <a:avLst/>
@@ -7585,8 +7585,8 @@
         </p:nvSpPr>
         <p:spPr>
           <a:xfrm>
-            <a:off x="571500" y="4171950"/>
-            <a:ext cx="2371725" cy="2000250"/>
+            <a:off x="7553325" y="1524000"/>
+            <a:ext cx="4067175" cy="428625"/>
           </a:xfrm>
           <a:prstGeom prst="rect">
             <a:avLst/>
@@ -7624,37 +7624,12 @@
         </p:nvSpPr>
         <p:spPr>
           <a:xfrm>
-            <a:off x="3114675" y="5029200"/>
-            <a:ext cx="171450" cy="19050"/>
-          </a:xfrm>
-          <a:prstGeom prst="rect">
-            <a:avLst/>
-          </a:prstGeom>
-          <a:solidFill>
-            <a:srgbClr val="3A3A5C"/>
-          </a:solidFill>
-          <a:ln w="12700">
-            <a:solidFill>
-              <a:srgbClr val="3A3A5C"/>
-            </a:solidFill>
-            <a:prstDash val="solid"/>
-          </a:ln>
-        </p:spPr>
-      </p:sp>
-      <p:sp>
-        <p:nvSpPr>
-          <p:cNvPr id="31" name="Shape 28"/>
-          <p:cNvSpPr/>
-          <p:nvPr/>
-        </p:nvSpPr>
-        <p:spPr>
-          <a:xfrm>
-            <a:off x="3286125" y="3752850"/>
-            <a:ext cx="2714625" cy="2571750"/>
+            <a:off x="7381875" y="2162175"/>
+            <a:ext cx="4410075" cy="838200"/>
           </a:xfrm>
           <a:prstGeom prst="roundRect">
             <a:avLst>
-              <a:gd name="adj" fmla="val 3556"/>
+              <a:gd name="adj" fmla="val 10909"/>
             </a:avLst>
           </a:prstGeom>
           <a:solidFill>
@@ -7670,14 +7645,14 @@
       </p:sp>
       <p:sp>
         <p:nvSpPr>
-          <p:cNvPr id="32" name="Shape 29"/>
-          <p:cNvSpPr/>
-          <p:nvPr/>
-        </p:nvSpPr>
-        <p:spPr>
-          <a:xfrm>
-            <a:off x="3286125" y="3752850"/>
-            <a:ext cx="57150" cy="2571750"/>
+          <p:cNvPr id="31" name="Shape 28"/>
+          <p:cNvSpPr/>
+          <p:nvPr/>
+        </p:nvSpPr>
+        <p:spPr>
+          <a:xfrm>
+            <a:off x="7381875" y="2162175"/>
+            <a:ext cx="57150" cy="838200"/>
           </a:xfrm>
           <a:prstGeom prst="rect">
             <a:avLst/>
@@ -7695,14 +7670,53 @@
       </p:sp>
       <p:sp>
         <p:nvSpPr>
+          <p:cNvPr id="32" name="Text 29"/>
+          <p:cNvSpPr/>
+          <p:nvPr/>
+        </p:nvSpPr>
+        <p:spPr>
+          <a:xfrm>
+            <a:off x="7553325" y="2276475"/>
+            <a:ext cx="4067175" cy="171450"/>
+          </a:xfrm>
+          <a:prstGeom prst="rect">
+            <a:avLst/>
+          </a:prstGeom>
+          <a:noFill/>
+          <a:ln/>
+        </p:spPr>
+        <p:txBody>
+          <a:bodyPr wrap="square" lIns="0" tIns="0" rIns="0" bIns="0" rtlCol="0" anchor="t"/>
+          <a:lstStyle/>
+          <a:p>
+            <a:pPr algn="l" indent="0" marL="0">
+              <a:buNone/>
+            </a:pPr>
+            <a:r>
+              <a:rPr lang="en-US" sz="1100" b="1" dirty="0">
+                <a:solidFill>
+                  <a:srgbClr val="F28E2B"/>
+                </a:solidFill>
+                <a:latin typeface="Helvetica Neue" pitchFamily="34" charset="0"/>
+                <a:ea typeface="Helvetica Neue" pitchFamily="34" charset="-122"/>
+                <a:cs typeface="Helvetica Neue" pitchFamily="34" charset="-120"/>
+              </a:rPr>
+              <a:t>GATEWAY</a:t>
+            </a:r>
+            <a:endParaRPr lang="en-US" sz="1100" dirty="0"/>
+          </a:p>
+        </p:txBody>
+      </p:sp>
+      <p:sp>
+        <p:nvSpPr>
           <p:cNvPr id="33" name="Text 30"/>
           <p:cNvSpPr/>
           <p:nvPr/>
         </p:nvSpPr>
         <p:spPr>
           <a:xfrm>
-            <a:off x="3457575" y="3905250"/>
-            <a:ext cx="2371725" cy="171450"/>
+            <a:off x="7553325" y="2457450"/>
+            <a:ext cx="4067175" cy="428625"/>
           </a:xfrm>
           <a:prstGeom prst="rect">
             <a:avLst/>
@@ -7718,45 +7732,6 @@
               <a:buNone/>
             </a:pPr>
             <a:r>
-              <a:rPr lang="en-US" sz="1100" b="1" dirty="0">
-                <a:solidFill>
-                  <a:srgbClr val="F28E2B"/>
-                </a:solidFill>
-                <a:latin typeface="Helvetica Neue" pitchFamily="34" charset="0"/>
-                <a:ea typeface="Helvetica Neue" pitchFamily="34" charset="-122"/>
-                <a:cs typeface="Helvetica Neue" pitchFamily="34" charset="-120"/>
-              </a:rPr>
-              <a:t>GATEWAY</a:t>
-            </a:r>
-            <a:endParaRPr lang="en-US" sz="1100" dirty="0"/>
-          </a:p>
-        </p:txBody>
-      </p:sp>
-      <p:sp>
-        <p:nvSpPr>
-          <p:cNvPr id="34" name="Text 31"/>
-          <p:cNvSpPr/>
-          <p:nvPr/>
-        </p:nvSpPr>
-        <p:spPr>
-          <a:xfrm>
-            <a:off x="3457575" y="4171950"/>
-            <a:ext cx="2371725" cy="2000250"/>
-          </a:xfrm>
-          <a:prstGeom prst="rect">
-            <a:avLst/>
-          </a:prstGeom>
-          <a:noFill/>
-          <a:ln/>
-        </p:spPr>
-        <p:txBody>
-          <a:bodyPr wrap="square" lIns="0" tIns="0" rIns="0" bIns="0" rtlCol="0" anchor="t"/>
-          <a:lstStyle/>
-          <a:p>
-            <a:pPr algn="l" indent="0" marL="0">
-              <a:buNone/>
-            </a:pPr>
-            <a:r>
               <a:rPr lang="en-US" sz="1600" b="1" dirty="0">
                 <a:solidFill>
                   <a:srgbClr val="EAEAEA"/>
@@ -7773,43 +7748,18 @@
       </p:sp>
       <p:sp>
         <p:nvSpPr>
-          <p:cNvPr id="35" name="Shape 32"/>
-          <p:cNvSpPr/>
-          <p:nvPr/>
-        </p:nvSpPr>
-        <p:spPr>
-          <a:xfrm>
-            <a:off x="6000750" y="5029200"/>
-            <a:ext cx="171450" cy="19050"/>
-          </a:xfrm>
-          <a:prstGeom prst="rect">
-            <a:avLst/>
-          </a:prstGeom>
-          <a:solidFill>
-            <a:srgbClr val="3A3A5C"/>
-          </a:solidFill>
-          <a:ln w="12700">
-            <a:solidFill>
-              <a:srgbClr val="3A3A5C"/>
-            </a:solidFill>
-            <a:prstDash val="solid"/>
-          </a:ln>
-        </p:spPr>
-      </p:sp>
-      <p:sp>
-        <p:nvSpPr>
-          <p:cNvPr id="36" name="Shape 33"/>
-          <p:cNvSpPr/>
-          <p:nvPr/>
-        </p:nvSpPr>
-        <p:spPr>
-          <a:xfrm>
-            <a:off x="6172200" y="3752850"/>
-            <a:ext cx="2714625" cy="2571750"/>
+          <p:cNvPr id="34" name="Shape 31"/>
+          <p:cNvSpPr/>
+          <p:nvPr/>
+        </p:nvSpPr>
+        <p:spPr>
+          <a:xfrm>
+            <a:off x="7381875" y="3095625"/>
+            <a:ext cx="4410075" cy="838200"/>
           </a:xfrm>
           <a:prstGeom prst="roundRect">
             <a:avLst>
-              <a:gd name="adj" fmla="val 3556"/>
+              <a:gd name="adj" fmla="val 10909"/>
             </a:avLst>
           </a:prstGeom>
           <a:solidFill>
@@ -7825,14 +7775,14 @@
       </p:sp>
       <p:sp>
         <p:nvSpPr>
-          <p:cNvPr id="37" name="Shape 34"/>
-          <p:cNvSpPr/>
-          <p:nvPr/>
-        </p:nvSpPr>
-        <p:spPr>
-          <a:xfrm>
-            <a:off x="6172200" y="3752850"/>
-            <a:ext cx="57150" cy="2571750"/>
+          <p:cNvPr id="35" name="Shape 32"/>
+          <p:cNvSpPr/>
+          <p:nvPr/>
+        </p:nvSpPr>
+        <p:spPr>
+          <a:xfrm>
+            <a:off x="7381875" y="3095625"/>
+            <a:ext cx="57150" cy="838200"/>
           </a:xfrm>
           <a:prstGeom prst="rect">
             <a:avLst/>
@@ -7850,14 +7800,14 @@
       </p:sp>
       <p:sp>
         <p:nvSpPr>
-          <p:cNvPr id="38" name="Text 35"/>
-          <p:cNvSpPr/>
-          <p:nvPr/>
-        </p:nvSpPr>
-        <p:spPr>
-          <a:xfrm>
-            <a:off x="6343650" y="3905250"/>
-            <a:ext cx="2371725" cy="171450"/>
+          <p:cNvPr id="36" name="Text 33"/>
+          <p:cNvSpPr/>
+          <p:nvPr/>
+        </p:nvSpPr>
+        <p:spPr>
+          <a:xfrm>
+            <a:off x="7553325" y="3209925"/>
+            <a:ext cx="4067175" cy="171450"/>
           </a:xfrm>
           <a:prstGeom prst="rect">
             <a:avLst/>
@@ -7889,14 +7839,14 @@
       </p:sp>
       <p:sp>
         <p:nvSpPr>
-          <p:cNvPr id="39" name="Text 36"/>
-          <p:cNvSpPr/>
-          <p:nvPr/>
-        </p:nvSpPr>
-        <p:spPr>
-          <a:xfrm>
-            <a:off x="6343650" y="4171950"/>
-            <a:ext cx="2371725" cy="2000250"/>
+          <p:cNvPr id="37" name="Text 34"/>
+          <p:cNvSpPr/>
+          <p:nvPr/>
+        </p:nvSpPr>
+        <p:spPr>
+          <a:xfrm>
+            <a:off x="7553325" y="3390900"/>
+            <a:ext cx="4067175" cy="428625"/>
           </a:xfrm>
           <a:prstGeom prst="rect">
             <a:avLst/>
@@ -7928,43 +7878,18 @@
       </p:sp>
       <p:sp>
         <p:nvSpPr>
-          <p:cNvPr id="40" name="Shape 37"/>
-          <p:cNvSpPr/>
-          <p:nvPr/>
-        </p:nvSpPr>
-        <p:spPr>
-          <a:xfrm>
-            <a:off x="8886825" y="5029200"/>
-            <a:ext cx="171450" cy="19050"/>
-          </a:xfrm>
-          <a:prstGeom prst="rect">
-            <a:avLst/>
-          </a:prstGeom>
-          <a:solidFill>
-            <a:srgbClr val="3A3A5C"/>
-          </a:solidFill>
-          <a:ln w="12700">
-            <a:solidFill>
-              <a:srgbClr val="3A3A5C"/>
-            </a:solidFill>
-            <a:prstDash val="solid"/>
-          </a:ln>
-        </p:spPr>
-      </p:sp>
-      <p:sp>
-        <p:nvSpPr>
-          <p:cNvPr id="41" name="Shape 38"/>
-          <p:cNvSpPr/>
-          <p:nvPr/>
-        </p:nvSpPr>
-        <p:spPr>
-          <a:xfrm>
-            <a:off x="9058275" y="3752850"/>
-            <a:ext cx="2714625" cy="2571750"/>
+          <p:cNvPr id="38" name="Shape 35"/>
+          <p:cNvSpPr/>
+          <p:nvPr/>
+        </p:nvSpPr>
+        <p:spPr>
+          <a:xfrm>
+            <a:off x="7381875" y="4029075"/>
+            <a:ext cx="4410075" cy="838200"/>
           </a:xfrm>
           <a:prstGeom prst="roundRect">
             <a:avLst>
-              <a:gd name="adj" fmla="val 3556"/>
+              <a:gd name="adj" fmla="val 10909"/>
             </a:avLst>
           </a:prstGeom>
           <a:solidFill>
@@ -7980,14 +7905,14 @@
       </p:sp>
       <p:sp>
         <p:nvSpPr>
-          <p:cNvPr id="42" name="Shape 39"/>
-          <p:cNvSpPr/>
-          <p:nvPr/>
-        </p:nvSpPr>
-        <p:spPr>
-          <a:xfrm>
-            <a:off x="9058275" y="3752850"/>
-            <a:ext cx="57150" cy="2571750"/>
+          <p:cNvPr id="39" name="Shape 36"/>
+          <p:cNvSpPr/>
+          <p:nvPr/>
+        </p:nvSpPr>
+        <p:spPr>
+          <a:xfrm>
+            <a:off x="7381875" y="4029075"/>
+            <a:ext cx="57150" cy="838200"/>
           </a:xfrm>
           <a:prstGeom prst="rect">
             <a:avLst/>
@@ -8005,14 +7930,14 @@
       </p:sp>
       <p:sp>
         <p:nvSpPr>
-          <p:cNvPr id="43" name="Text 40"/>
-          <p:cNvSpPr/>
-          <p:nvPr/>
-        </p:nvSpPr>
-        <p:spPr>
-          <a:xfrm>
-            <a:off x="9229725" y="3905250"/>
-            <a:ext cx="2371725" cy="171450"/>
+          <p:cNvPr id="40" name="Text 37"/>
+          <p:cNvSpPr/>
+          <p:nvPr/>
+        </p:nvSpPr>
+        <p:spPr>
+          <a:xfrm>
+            <a:off x="7553325" y="4143375"/>
+            <a:ext cx="4067175" cy="171450"/>
           </a:xfrm>
           <a:prstGeom prst="rect">
             <a:avLst/>
@@ -8044,14 +7969,14 @@
       </p:sp>
       <p:sp>
         <p:nvSpPr>
-          <p:cNvPr id="44" name="Text 41"/>
-          <p:cNvSpPr/>
-          <p:nvPr/>
-        </p:nvSpPr>
-        <p:spPr>
-          <a:xfrm>
-            <a:off x="9229725" y="4171950"/>
-            <a:ext cx="2371725" cy="2000250"/>
+          <p:cNvPr id="41" name="Text 38"/>
+          <p:cNvSpPr/>
+          <p:nvPr/>
+        </p:nvSpPr>
+        <p:spPr>
+          <a:xfrm>
+            <a:off x="7553325" y="4324350"/>
+            <a:ext cx="4067175" cy="428625"/>
           </a:xfrm>
           <a:prstGeom prst="rect">
             <a:avLst/>
@@ -8152,7 +8077,7 @@
         <p:spPr>
           <a:xfrm>
             <a:off x="400050" y="247650"/>
-            <a:ext cx="10839450" cy="381000"/>
+            <a:ext cx="10839450" cy="428625"/>
           </a:xfrm>
           <a:prstGeom prst="rect">
             <a:avLst/>
@@ -8168,7 +8093,7 @@
               <a:buNone/>
             </a:pPr>
             <a:r>
-              <a:rPr lang="en-US" sz="3000" b="1" dirty="0">
+              <a:rPr lang="en-US" sz="3200" b="1" dirty="0">
                 <a:solidFill>
                   <a:srgbClr val="EAEAEA"/>
                 </a:solidFill>
@@ -8178,7 +8103,7 @@
               </a:rPr>
               <a:t>System ownership</a:t>
             </a:r>
-            <a:endParaRPr lang="en-US" sz="3000" dirty="0"/>
+            <a:endParaRPr lang="en-US" sz="3200" dirty="0"/>
           </a:p>
         </p:txBody>
       </p:sp>
@@ -8268,7 +8193,7 @@
         </p:nvSpPr>
         <p:spPr>
           <a:xfrm>
-            <a:off x="4045458" y="857250"/>
+            <a:off x="4045458" y="981075"/>
             <a:ext cx="4101084" cy="838200"/>
           </a:xfrm>
           <a:prstGeom prst="roundRect">
@@ -8295,7 +8220,7 @@
         </p:nvSpPr>
         <p:spPr>
           <a:xfrm>
-            <a:off x="4045458" y="857250"/>
+            <a:off x="4045458" y="981075"/>
             <a:ext cx="57150" cy="838200"/>
           </a:xfrm>
           <a:prstGeom prst="rect">
@@ -8320,7 +8245,7 @@
         </p:nvSpPr>
         <p:spPr>
           <a:xfrm>
-            <a:off x="4216908" y="1009650"/>
+            <a:off x="4216908" y="1095375"/>
             <a:ext cx="3758184" cy="171450"/>
           </a:xfrm>
           <a:prstGeom prst="rect">
@@ -8359,7 +8284,7 @@
         </p:nvSpPr>
         <p:spPr>
           <a:xfrm>
-            <a:off x="6081713" y="1695450"/>
+            <a:off x="6081713" y="1819275"/>
             <a:ext cx="28575" cy="342900"/>
           </a:xfrm>
           <a:prstGeom prst="rect">
@@ -8384,7 +8309,7 @@
         </p:nvSpPr>
         <p:spPr>
           <a:xfrm>
-            <a:off x="1752600" y="2024062"/>
+            <a:off x="1752600" y="2147888"/>
             <a:ext cx="8686800" cy="28575"/>
           </a:xfrm>
           <a:prstGeom prst="rect">
@@ -8409,7 +8334,7 @@
         </p:nvSpPr>
         <p:spPr>
           <a:xfrm>
-            <a:off x="1738313" y="2038350"/>
+            <a:off x="1738313" y="2162175"/>
             <a:ext cx="28575" cy="342900"/>
           </a:xfrm>
           <a:prstGeom prst="rect">
@@ -8434,7 +8359,7 @@
         </p:nvSpPr>
         <p:spPr>
           <a:xfrm>
-            <a:off x="4633913" y="2038350"/>
+            <a:off x="4633913" y="2162175"/>
             <a:ext cx="28575" cy="342900"/>
           </a:xfrm>
           <a:prstGeom prst="rect">
@@ -8459,7 +8384,7 @@
         </p:nvSpPr>
         <p:spPr>
           <a:xfrm>
-            <a:off x="7529513" y="2038350"/>
+            <a:off x="7529513" y="2162175"/>
             <a:ext cx="28575" cy="342900"/>
           </a:xfrm>
           <a:prstGeom prst="rect">
@@ -8484,7 +8409,7 @@
         </p:nvSpPr>
         <p:spPr>
           <a:xfrm>
-            <a:off x="10425113" y="2038350"/>
+            <a:off x="10425113" y="2162175"/>
             <a:ext cx="28575" cy="342900"/>
           </a:xfrm>
           <a:prstGeom prst="rect">
@@ -8509,7 +8434,7 @@
         </p:nvSpPr>
         <p:spPr>
           <a:xfrm>
-            <a:off x="400050" y="2381250"/>
+            <a:off x="400050" y="2505075"/>
             <a:ext cx="2705100" cy="1047750"/>
           </a:xfrm>
           <a:prstGeom prst="roundRect">
@@ -8536,7 +8461,7 @@
         </p:nvSpPr>
         <p:spPr>
           <a:xfrm>
-            <a:off x="400050" y="2381250"/>
+            <a:off x="400050" y="2505075"/>
             <a:ext cx="57150" cy="1047750"/>
           </a:xfrm>
           <a:prstGeom prst="rect">
@@ -8561,7 +8486,7 @@
         </p:nvSpPr>
         <p:spPr>
           <a:xfrm>
-            <a:off x="571500" y="2533650"/>
+            <a:off x="571500" y="2619375"/>
             <a:ext cx="2362200" cy="171450"/>
           </a:xfrm>
           <a:prstGeom prst="rect">
@@ -8600,7 +8525,7 @@
         </p:nvSpPr>
         <p:spPr>
           <a:xfrm>
-            <a:off x="3295650" y="2381250"/>
+            <a:off x="3295650" y="2505075"/>
             <a:ext cx="2705100" cy="1047750"/>
           </a:xfrm>
           <a:prstGeom prst="roundRect">
@@ -8627,7 +8552,7 @@
         </p:nvSpPr>
         <p:spPr>
           <a:xfrm>
-            <a:off x="3295650" y="2381250"/>
+            <a:off x="3295650" y="2505075"/>
             <a:ext cx="57150" cy="1047750"/>
           </a:xfrm>
           <a:prstGeom prst="rect">
@@ -8652,7 +8577,7 @@
         </p:nvSpPr>
         <p:spPr>
           <a:xfrm>
-            <a:off x="3467100" y="2533650"/>
+            <a:off x="3467100" y="2619375"/>
             <a:ext cx="2362200" cy="171450"/>
           </a:xfrm>
           <a:prstGeom prst="rect">
@@ -8691,7 +8616,7 @@
         </p:nvSpPr>
         <p:spPr>
           <a:xfrm>
-            <a:off x="6191250" y="2381250"/>
+            <a:off x="6191250" y="2505075"/>
             <a:ext cx="2705100" cy="1047750"/>
           </a:xfrm>
           <a:prstGeom prst="roundRect">
@@ -8718,7 +8643,7 @@
         </p:nvSpPr>
         <p:spPr>
           <a:xfrm>
-            <a:off x="6191250" y="2381250"/>
+            <a:off x="6191250" y="2505075"/>
             <a:ext cx="57150" cy="1047750"/>
           </a:xfrm>
           <a:prstGeom prst="rect">
@@ -8743,7 +8668,7 @@
         </p:nvSpPr>
         <p:spPr>
           <a:xfrm>
-            <a:off x="6362700" y="2533650"/>
+            <a:off x="6362700" y="2619375"/>
             <a:ext cx="2362200" cy="171450"/>
           </a:xfrm>
           <a:prstGeom prst="rect">
@@ -8782,7 +8707,7 @@
         </p:nvSpPr>
         <p:spPr>
           <a:xfrm>
-            <a:off x="9086850" y="2381250"/>
+            <a:off x="9086850" y="2505075"/>
             <a:ext cx="2705100" cy="1047750"/>
           </a:xfrm>
           <a:prstGeom prst="roundRect">
@@ -8809,7 +8734,7 @@
         </p:nvSpPr>
         <p:spPr>
           <a:xfrm>
-            <a:off x="9086850" y="2381250"/>
+            <a:off x="9086850" y="2505075"/>
             <a:ext cx="57150" cy="1047750"/>
           </a:xfrm>
           <a:prstGeom prst="rect">
@@ -8834,7 +8759,7 @@
         </p:nvSpPr>
         <p:spPr>
           <a:xfrm>
-            <a:off x="9258300" y="2533650"/>
+            <a:off x="9258300" y="2619375"/>
             <a:ext cx="2362200" cy="171450"/>
           </a:xfrm>
           <a:prstGeom prst="rect">
@@ -8936,7 +8861,7 @@
         <p:spPr>
           <a:xfrm>
             <a:off x="400050" y="247650"/>
-            <a:ext cx="10839450" cy="381000"/>
+            <a:ext cx="10839450" cy="428625"/>
           </a:xfrm>
           <a:prstGeom prst="rect">
             <a:avLst/>
@@ -8952,7 +8877,7 @@
               <a:buNone/>
             </a:pPr>
             <a:r>
-              <a:rPr lang="en-US" sz="3000" b="1" dirty="0">
+              <a:rPr lang="en-US" sz="3200" b="1" dirty="0">
                 <a:solidFill>
                   <a:srgbClr val="EAEAEA"/>
                 </a:solidFill>
@@ -8962,7 +8887,7 @@
               </a:rPr>
               <a:t>12-week build plan</a:t>
             </a:r>
-            <a:endParaRPr lang="en-US" sz="3000" dirty="0"/>
+            <a:endParaRPr lang="en-US" sz="3200" dirty="0"/>
           </a:p>
         </p:txBody>
       </p:sp>
@@ -9052,7 +8977,7 @@
         </p:nvSpPr>
         <p:spPr>
           <a:xfrm>
-            <a:off x="1905000" y="781050"/>
+            <a:off x="1905000" y="904875"/>
             <a:ext cx="3168650" cy="171450"/>
           </a:xfrm>
           <a:prstGeom prst="rect">
@@ -9091,7 +9016,7 @@
         </p:nvSpPr>
         <p:spPr>
           <a:xfrm>
-            <a:off x="5226050" y="781050"/>
+            <a:off x="5226050" y="904875"/>
             <a:ext cx="3168650" cy="171450"/>
           </a:xfrm>
           <a:prstGeom prst="rect">
@@ -9130,7 +9055,7 @@
         </p:nvSpPr>
         <p:spPr>
           <a:xfrm>
-            <a:off x="8547100" y="781050"/>
+            <a:off x="8547100" y="904875"/>
             <a:ext cx="3168650" cy="171450"/>
           </a:xfrm>
           <a:prstGeom prst="rect">
@@ -9169,8 +9094,8 @@
         </p:nvSpPr>
         <p:spPr>
           <a:xfrm>
-            <a:off x="400050" y="1123950"/>
-            <a:ext cx="1257300" cy="963930"/>
+            <a:off x="400050" y="1247775"/>
+            <a:ext cx="1257300" cy="939165"/>
           </a:xfrm>
           <a:prstGeom prst="rect">
             <a:avLst/>
@@ -9208,8 +9133,8 @@
         </p:nvSpPr>
         <p:spPr>
           <a:xfrm>
-            <a:off x="1828800" y="1123950"/>
-            <a:ext cx="9963150" cy="963930"/>
+            <a:off x="1828800" y="1247775"/>
+            <a:ext cx="9963150" cy="939165"/>
           </a:xfrm>
           <a:prstGeom prst="rect">
             <a:avLst/>
@@ -9233,8 +9158,8 @@
         </p:nvSpPr>
         <p:spPr>
           <a:xfrm>
-            <a:off x="400050" y="2164080"/>
-            <a:ext cx="1257300" cy="963930"/>
+            <a:off x="400050" y="2263140"/>
+            <a:ext cx="1257300" cy="939165"/>
           </a:xfrm>
           <a:prstGeom prst="rect">
             <a:avLst/>
@@ -9272,8 +9197,8 @@
         </p:nvSpPr>
         <p:spPr>
           <a:xfrm>
-            <a:off x="1828800" y="2164080"/>
-            <a:ext cx="9963150" cy="963930"/>
+            <a:off x="1828800" y="2263140"/>
+            <a:ext cx="9963150" cy="939165"/>
           </a:xfrm>
           <a:prstGeom prst="rect">
             <a:avLst/>
@@ -9297,8 +9222,8 @@
         </p:nvSpPr>
         <p:spPr>
           <a:xfrm>
-            <a:off x="400050" y="3204210"/>
-            <a:ext cx="1257300" cy="963930"/>
+            <a:off x="400050" y="3278505"/>
+            <a:ext cx="1257300" cy="939165"/>
           </a:xfrm>
           <a:prstGeom prst="rect">
             <a:avLst/>
@@ -9336,8 +9261,8 @@
         </p:nvSpPr>
         <p:spPr>
           <a:xfrm>
-            <a:off x="1828800" y="3204210"/>
-            <a:ext cx="9963150" cy="963930"/>
+            <a:off x="1828800" y="3278505"/>
+            <a:ext cx="9963150" cy="939165"/>
           </a:xfrm>
           <a:prstGeom prst="rect">
             <a:avLst/>
@@ -9361,8 +9286,8 @@
         </p:nvSpPr>
         <p:spPr>
           <a:xfrm>
-            <a:off x="400050" y="4244340"/>
-            <a:ext cx="1257300" cy="963930"/>
+            <a:off x="400050" y="4293870"/>
+            <a:ext cx="1257300" cy="939165"/>
           </a:xfrm>
           <a:prstGeom prst="rect">
             <a:avLst/>
@@ -9400,8 +9325,8 @@
         </p:nvSpPr>
         <p:spPr>
           <a:xfrm>
-            <a:off x="1828800" y="4244340"/>
-            <a:ext cx="9963150" cy="963930"/>
+            <a:off x="1828800" y="4293870"/>
+            <a:ext cx="9963150" cy="939165"/>
           </a:xfrm>
           <a:prstGeom prst="rect">
             <a:avLst/>
@@ -9425,8 +9350,8 @@
         </p:nvSpPr>
         <p:spPr>
           <a:xfrm>
-            <a:off x="400050" y="5284470"/>
-            <a:ext cx="1257300" cy="963930"/>
+            <a:off x="400050" y="5309235"/>
+            <a:ext cx="1257300" cy="939165"/>
           </a:xfrm>
           <a:prstGeom prst="rect">
             <a:avLst/>
@@ -9464,8 +9389,8 @@
         </p:nvSpPr>
         <p:spPr>
           <a:xfrm>
-            <a:off x="1828800" y="5284470"/>
-            <a:ext cx="9963150" cy="963930"/>
+            <a:off x="1828800" y="5309235"/>
+            <a:ext cx="9963150" cy="939165"/>
           </a:xfrm>
           <a:prstGeom prst="rect">
             <a:avLst/>
@@ -9489,7 +9414,7 @@
         </p:nvSpPr>
         <p:spPr>
           <a:xfrm>
-            <a:off x="1924050" y="1415415"/>
+            <a:off x="1924050" y="1526858"/>
             <a:ext cx="3130550" cy="381000"/>
           </a:xfrm>
           <a:prstGeom prst="roundRect">
@@ -9516,7 +9441,7 @@
         </p:nvSpPr>
         <p:spPr>
           <a:xfrm>
-            <a:off x="2000250" y="1415415"/>
+            <a:off x="2000250" y="1526858"/>
             <a:ext cx="2978150" cy="381000"/>
           </a:xfrm>
           <a:prstGeom prst="rect">
@@ -9555,7 +9480,7 @@
         </p:nvSpPr>
         <p:spPr>
           <a:xfrm>
-            <a:off x="1924050" y="2455545"/>
+            <a:off x="1924050" y="2542222"/>
             <a:ext cx="3130550" cy="381000"/>
           </a:xfrm>
           <a:prstGeom prst="roundRect">
@@ -9582,7 +9507,7 @@
         </p:nvSpPr>
         <p:spPr>
           <a:xfrm>
-            <a:off x="2000250" y="2455545"/>
+            <a:off x="2000250" y="2542222"/>
             <a:ext cx="2978150" cy="381000"/>
           </a:xfrm>
           <a:prstGeom prst="rect">
@@ -9621,7 +9546,7 @@
         </p:nvSpPr>
         <p:spPr>
           <a:xfrm>
-            <a:off x="5245100" y="3495675"/>
+            <a:off x="5245100" y="3557588"/>
             <a:ext cx="3130550" cy="381000"/>
           </a:xfrm>
           <a:prstGeom prst="roundRect">
@@ -9648,7 +9573,7 @@
         </p:nvSpPr>
         <p:spPr>
           <a:xfrm>
-            <a:off x="5321300" y="3495675"/>
+            <a:off x="5321300" y="3557588"/>
             <a:ext cx="2978150" cy="381000"/>
           </a:xfrm>
           <a:prstGeom prst="rect">
@@ -9687,7 +9612,7 @@
         </p:nvSpPr>
         <p:spPr>
           <a:xfrm>
-            <a:off x="5245100" y="4535805"/>
+            <a:off x="5245100" y="4572953"/>
             <a:ext cx="3130550" cy="381000"/>
           </a:xfrm>
           <a:prstGeom prst="roundRect">
@@ -9714,7 +9639,7 @@
         </p:nvSpPr>
         <p:spPr>
           <a:xfrm>
-            <a:off x="5321300" y="4535805"/>
+            <a:off x="5321300" y="4572953"/>
             <a:ext cx="2978150" cy="381000"/>
           </a:xfrm>
           <a:prstGeom prst="rect">
@@ -9753,7 +9678,7 @@
         </p:nvSpPr>
         <p:spPr>
           <a:xfrm>
-            <a:off x="8566150" y="5575935"/>
+            <a:off x="8566150" y="5588317"/>
             <a:ext cx="3130550" cy="381000"/>
           </a:xfrm>
           <a:prstGeom prst="roundRect">
@@ -9780,7 +9705,7 @@
         </p:nvSpPr>
         <p:spPr>
           <a:xfrm>
-            <a:off x="8642350" y="5575935"/>
+            <a:off x="8642350" y="5588317"/>
             <a:ext cx="2978150" cy="381000"/>
           </a:xfrm>
           <a:prstGeom prst="rect">
@@ -9882,7 +9807,7 @@
         <p:spPr>
           <a:xfrm>
             <a:off x="400050" y="247650"/>
-            <a:ext cx="10839450" cy="381000"/>
+            <a:ext cx="10839450" cy="428625"/>
           </a:xfrm>
           <a:prstGeom prst="rect">
             <a:avLst/>
@@ -9898,7 +9823,7 @@
               <a:buNone/>
             </a:pPr>
             <a:r>
-              <a:rPr lang="en-US" sz="3000" b="1" dirty="0">
+              <a:rPr lang="en-US" sz="3200" b="1" dirty="0">
                 <a:solidFill>
                   <a:srgbClr val="EAEAEA"/>
                 </a:solidFill>
@@ -9908,7 +9833,7 @@
               </a:rPr>
               <a:t>Surface priority from comps</a:t>
             </a:r>
-            <a:endParaRPr lang="en-US" sz="3000" dirty="0"/>
+            <a:endParaRPr lang="en-US" sz="3200" dirty="0"/>
           </a:p>
         </p:txBody>
       </p:sp>
@@ -9998,12 +9923,12 @@
         </p:nvSpPr>
         <p:spPr>
           <a:xfrm>
-            <a:off x="400050" y="781050"/>
-            <a:ext cx="7058025" cy="5543550"/>
+            <a:off x="400050" y="904875"/>
+            <a:ext cx="7058025" cy="5419725"/>
           </a:xfrm>
           <a:prstGeom prst="roundRect">
             <a:avLst>
-              <a:gd name="adj" fmla="val 1649"/>
+              <a:gd name="adj" fmla="val 1687"/>
             </a:avLst>
           </a:prstGeom>
           <a:solidFill>
@@ -10033,7 +9958,7 @@
         </p:blipFill>
         <p:spPr>
           <a:xfrm>
-            <a:off x="552450" y="2019300"/>
+            <a:off x="552450" y="2085975"/>
             <a:ext cx="6753225" cy="3067050"/>
           </a:xfrm>
           <a:prstGeom prst="rect">
@@ -10049,7 +9974,7 @@
         </p:nvSpPr>
         <p:spPr>
           <a:xfrm>
-            <a:off x="7743825" y="781050"/>
+            <a:off x="7743825" y="904875"/>
             <a:ext cx="4048125" cy="171450"/>
           </a:xfrm>
           <a:prstGeom prst="rect">
@@ -10088,7 +10013,7 @@
         </p:nvSpPr>
         <p:spPr>
           <a:xfrm>
-            <a:off x="7743825" y="1209675"/>
+            <a:off x="7743825" y="1419225"/>
             <a:ext cx="66675" cy="66675"/>
           </a:xfrm>
           <a:prstGeom prst="roundRect">
@@ -10115,17 +10040,17 @@
         </p:nvSpPr>
         <p:spPr>
           <a:xfrm>
-            <a:off x="7934325" y="1123950"/>
-            <a:ext cx="3857625" cy="342900"/>
-          </a:xfrm>
-          <a:prstGeom prst="rect">
-            <a:avLst/>
-          </a:prstGeom>
-          <a:noFill/>
-          <a:ln/>
-        </p:spPr>
-        <p:txBody>
-          <a:bodyPr wrap="square" lIns="0" tIns="0" rIns="0" bIns="0" rtlCol="0" anchor="t"/>
+            <a:off x="7934325" y="1247775"/>
+            <a:ext cx="3857625" cy="419100"/>
+          </a:xfrm>
+          <a:prstGeom prst="rect">
+            <a:avLst/>
+          </a:prstGeom>
+          <a:noFill/>
+          <a:ln/>
+        </p:spPr>
+        <p:txBody>
+          <a:bodyPr wrap="square" lIns="0" tIns="0" rIns="0" bIns="0" rtlCol="0" anchor="ctr"/>
           <a:lstStyle/>
           <a:p>
             <a:pPr algn="l" indent="0" marL="0">
@@ -10154,7 +10079,7 @@
         </p:nvSpPr>
         <p:spPr>
           <a:xfrm>
-            <a:off x="7743825" y="1743075"/>
+            <a:off x="7743825" y="1876425"/>
             <a:ext cx="66675" cy="66675"/>
           </a:xfrm>
           <a:prstGeom prst="roundRect">
@@ -10181,17 +10106,17 @@
         </p:nvSpPr>
         <p:spPr>
           <a:xfrm>
-            <a:off x="7934325" y="1657350"/>
-            <a:ext cx="3857625" cy="342900"/>
-          </a:xfrm>
-          <a:prstGeom prst="rect">
-            <a:avLst/>
-          </a:prstGeom>
-          <a:noFill/>
-          <a:ln/>
-        </p:spPr>
-        <p:txBody>
-          <a:bodyPr wrap="square" lIns="0" tIns="0" rIns="0" bIns="0" rtlCol="0" anchor="t"/>
+            <a:off x="7934325" y="1704975"/>
+            <a:ext cx="3857625" cy="419100"/>
+          </a:xfrm>
+          <a:prstGeom prst="rect">
+            <a:avLst/>
+          </a:prstGeom>
+          <a:noFill/>
+          <a:ln/>
+        </p:spPr>
+        <p:txBody>
+          <a:bodyPr wrap="square" lIns="0" tIns="0" rIns="0" bIns="0" rtlCol="0" anchor="ctr"/>
           <a:lstStyle/>
           <a:p>
             <a:pPr algn="l" indent="0" marL="0">
@@ -10220,7 +10145,7 @@
         </p:nvSpPr>
         <p:spPr>
           <a:xfrm>
-            <a:off x="7743825" y="2276475"/>
+            <a:off x="7743825" y="2333625"/>
             <a:ext cx="66675" cy="66675"/>
           </a:xfrm>
           <a:prstGeom prst="roundRect">
@@ -10247,17 +10172,17 @@
         </p:nvSpPr>
         <p:spPr>
           <a:xfrm>
-            <a:off x="7934325" y="2190750"/>
-            <a:ext cx="3857625" cy="342900"/>
-          </a:xfrm>
-          <a:prstGeom prst="rect">
-            <a:avLst/>
-          </a:prstGeom>
-          <a:noFill/>
-          <a:ln/>
-        </p:spPr>
-        <p:txBody>
-          <a:bodyPr wrap="square" lIns="0" tIns="0" rIns="0" bIns="0" rtlCol="0" anchor="t"/>
+            <a:off x="7934325" y="2162175"/>
+            <a:ext cx="3857625" cy="419100"/>
+          </a:xfrm>
+          <a:prstGeom prst="rect">
+            <a:avLst/>
+          </a:prstGeom>
+          <a:noFill/>
+          <a:ln/>
+        </p:spPr>
+        <p:txBody>
+          <a:bodyPr wrap="square" lIns="0" tIns="0" rIns="0" bIns="0" rtlCol="0" anchor="ctr"/>
           <a:lstStyle/>
           <a:p>
             <a:pPr algn="l" indent="0" marL="0">
